--- a/docs/CodySafe 발표자료 (유레카)_v4.pptx
+++ b/docs/CodySafe 발표자료 (유레카)_v4.pptx
@@ -10760,17 +10760,17 @@
                 <a:gridCol w="3277791"/>
                 <a:gridCol w="1808659"/>
               </a:tblGrid>
-              <a:tr h="139700">
-                <a:tc>
-                  <a:txBody>
-                    <a:bodyPr/>
-                    <a:lstStyle/>
-                    <a:p>
-                      <a:pPr indent="0" marL="0">
-                        <a:buNone/>
-                      </a:pPr>
-                      <a:r>
-                        <a:rPr lang="en-US" sz="900" b="1" dirty="0">
+              <a:tr h="127000">
+                <a:tc>
+                  <a:txBody>
+                    <a:bodyPr/>
+                    <a:lstStyle/>
+                    <a:p>
+                      <a:pPr indent="0" marL="0">
+                        <a:buNone/>
+                      </a:pPr>
+                      <a:r>
+                        <a:rPr lang="en-US" sz="800" b="1" dirty="0">
                           <a:solidFill>
                             <a:srgbClr val="FFFFFF"/>
                           </a:solidFill>
@@ -10816,7 +10816,7 @@
                         <a:buNone/>
                       </a:pPr>
                       <a:r>
-                        <a:rPr lang="en-US" sz="900" b="1" dirty="0">
+                        <a:rPr lang="en-US" sz="800" b="1" dirty="0">
                           <a:solidFill>
                             <a:srgbClr val="FFFFFF"/>
                           </a:solidFill>
@@ -10862,7 +10862,7 @@
                         <a:buNone/>
                       </a:pPr>
                       <a:r>
-                        <a:rPr lang="en-US" sz="900" b="1" dirty="0">
+                        <a:rPr lang="en-US" sz="800" b="1" dirty="0">
                           <a:solidFill>
                             <a:srgbClr val="FFFFFF"/>
                           </a:solidFill>
@@ -10908,7 +10908,7 @@
                         <a:buNone/>
                       </a:pPr>
                       <a:r>
-                        <a:rPr lang="en-US" sz="900" b="1" dirty="0">
+                        <a:rPr lang="en-US" sz="800" b="1" dirty="0">
                           <a:solidFill>
                             <a:srgbClr val="FFFFFF"/>
                           </a:solidFill>
@@ -10946,17 +10946,17 @@
                   </a:tcPr>
                 </a:tc>
               </a:tr>
-              <a:tr h="139700">
-                <a:tc>
-                  <a:txBody>
-                    <a:bodyPr/>
-                    <a:lstStyle/>
-                    <a:p>
-                      <a:pPr indent="0" marL="0">
-                        <a:buNone/>
-                      </a:pPr>
-                      <a:r>
-                        <a:rPr lang="en-US" sz="900" dirty="0">
+              <a:tr h="127000">
+                <a:tc>
+                  <a:txBody>
+                    <a:bodyPr/>
+                    <a:lstStyle/>
+                    <a:p>
+                      <a:pPr indent="0" marL="0">
+                        <a:buNone/>
+                      </a:pPr>
+                      <a:r>
+                        <a:rPr lang="en-US" sz="800" dirty="0">
                           <a:solidFill>
                             <a:srgbClr val="46536B"/>
                           </a:solidFill>
@@ -10999,7 +10999,7 @@
                         <a:buNone/>
                       </a:pPr>
                       <a:r>
-                        <a:rPr lang="en-US" sz="900" dirty="0">
+                        <a:rPr lang="en-US" sz="800" dirty="0">
                           <a:solidFill>
                             <a:srgbClr val="46536B"/>
                           </a:solidFill>
@@ -11042,7 +11042,7 @@
                         <a:buNone/>
                       </a:pPr>
                       <a:r>
-                        <a:rPr lang="en-US" sz="900" dirty="0">
+                        <a:rPr lang="en-US" sz="800" dirty="0">
                           <a:solidFill>
                             <a:srgbClr val="46536B"/>
                           </a:solidFill>
@@ -11085,7 +11085,7 @@
                         <a:buNone/>
                       </a:pPr>
                       <a:r>
-                        <a:rPr lang="en-US" sz="900" dirty="0">
+                        <a:rPr lang="en-US" sz="800" dirty="0">
                           <a:solidFill>
                             <a:srgbClr val="46536B"/>
                           </a:solidFill>
@@ -11120,17 +11120,17 @@
                   </a:tcPr>
                 </a:tc>
               </a:tr>
-              <a:tr h="139700">
-                <a:tc>
-                  <a:txBody>
-                    <a:bodyPr/>
-                    <a:lstStyle/>
-                    <a:p>
-                      <a:pPr indent="0" marL="0">
-                        <a:buNone/>
-                      </a:pPr>
-                      <a:r>
-                        <a:rPr lang="en-US" sz="900" dirty="0">
+              <a:tr h="127000">
+                <a:tc>
+                  <a:txBody>
+                    <a:bodyPr/>
+                    <a:lstStyle/>
+                    <a:p>
+                      <a:pPr indent="0" marL="0">
+                        <a:buNone/>
+                      </a:pPr>
+                      <a:r>
+                        <a:rPr lang="en-US" sz="800" dirty="0">
                           <a:solidFill>
                             <a:srgbClr val="46536B"/>
                           </a:solidFill>
@@ -11173,7 +11173,7 @@
                         <a:buNone/>
                       </a:pPr>
                       <a:r>
-                        <a:rPr lang="en-US" sz="900" dirty="0">
+                        <a:rPr lang="en-US" sz="800" dirty="0">
                           <a:solidFill>
                             <a:srgbClr val="46536B"/>
                           </a:solidFill>
@@ -11216,7 +11216,7 @@
                         <a:buNone/>
                       </a:pPr>
                       <a:r>
-                        <a:rPr lang="en-US" sz="900" dirty="0">
+                        <a:rPr lang="en-US" sz="800" dirty="0">
                           <a:solidFill>
                             <a:srgbClr val="46536B"/>
                           </a:solidFill>
@@ -11259,7 +11259,7 @@
                         <a:buNone/>
                       </a:pPr>
                       <a:r>
-                        <a:rPr lang="en-US" sz="900" dirty="0">
+                        <a:rPr lang="en-US" sz="800" dirty="0">
                           <a:solidFill>
                             <a:srgbClr val="46536B"/>
                           </a:solidFill>
@@ -11294,17 +11294,17 @@
                   </a:tcPr>
                 </a:tc>
               </a:tr>
-              <a:tr h="139700">
-                <a:tc>
-                  <a:txBody>
-                    <a:bodyPr/>
-                    <a:lstStyle/>
-                    <a:p>
-                      <a:pPr indent="0" marL="0">
-                        <a:buNone/>
-                      </a:pPr>
-                      <a:r>
-                        <a:rPr lang="en-US" sz="900" dirty="0">
+              <a:tr h="127000">
+                <a:tc>
+                  <a:txBody>
+                    <a:bodyPr/>
+                    <a:lstStyle/>
+                    <a:p>
+                      <a:pPr indent="0" marL="0">
+                        <a:buNone/>
+                      </a:pPr>
+                      <a:r>
+                        <a:rPr lang="en-US" sz="800" dirty="0">
                           <a:solidFill>
                             <a:srgbClr val="46536B"/>
                           </a:solidFill>
@@ -11347,7 +11347,7 @@
                         <a:buNone/>
                       </a:pPr>
                       <a:r>
-                        <a:rPr lang="en-US" sz="900" dirty="0">
+                        <a:rPr lang="en-US" sz="800" dirty="0">
                           <a:solidFill>
                             <a:srgbClr val="46536B"/>
                           </a:solidFill>
@@ -11390,7 +11390,7 @@
                         <a:buNone/>
                       </a:pPr>
                       <a:r>
-                        <a:rPr lang="en-US" sz="900" dirty="0">
+                        <a:rPr lang="en-US" sz="800" dirty="0">
                           <a:solidFill>
                             <a:srgbClr val="46536B"/>
                           </a:solidFill>
@@ -11433,7 +11433,7 @@
                         <a:buNone/>
                       </a:pPr>
                       <a:r>
-                        <a:rPr lang="en-US" sz="900" dirty="0">
+                        <a:rPr lang="en-US" sz="800" dirty="0">
                           <a:solidFill>
                             <a:srgbClr val="46536B"/>
                           </a:solidFill>
@@ -11468,17 +11468,17 @@
                   </a:tcPr>
                 </a:tc>
               </a:tr>
-              <a:tr h="139700">
-                <a:tc>
-                  <a:txBody>
-                    <a:bodyPr/>
-                    <a:lstStyle/>
-                    <a:p>
-                      <a:pPr indent="0" marL="0">
-                        <a:buNone/>
-                      </a:pPr>
-                      <a:r>
-                        <a:rPr lang="en-US" sz="900" dirty="0">
+              <a:tr h="127000">
+                <a:tc>
+                  <a:txBody>
+                    <a:bodyPr/>
+                    <a:lstStyle/>
+                    <a:p>
+                      <a:pPr indent="0" marL="0">
+                        <a:buNone/>
+                      </a:pPr>
+                      <a:r>
+                        <a:rPr lang="en-US" sz="800" dirty="0">
                           <a:solidFill>
                             <a:srgbClr val="46536B"/>
                           </a:solidFill>
@@ -11521,7 +11521,7 @@
                         <a:buNone/>
                       </a:pPr>
                       <a:r>
-                        <a:rPr lang="en-US" sz="900" dirty="0">
+                        <a:rPr lang="en-US" sz="800" dirty="0">
                           <a:solidFill>
                             <a:srgbClr val="46536B"/>
                           </a:solidFill>
@@ -11564,7 +11564,7 @@
                         <a:buNone/>
                       </a:pPr>
                       <a:r>
-                        <a:rPr lang="en-US" sz="900" dirty="0">
+                        <a:rPr lang="en-US" sz="800" dirty="0">
                           <a:solidFill>
                             <a:srgbClr val="46536B"/>
                           </a:solidFill>
@@ -11607,7 +11607,7 @@
                         <a:buNone/>
                       </a:pPr>
                       <a:r>
-                        <a:rPr lang="en-US" sz="900" dirty="0">
+                        <a:rPr lang="en-US" sz="800" dirty="0">
                           <a:solidFill>
                             <a:srgbClr val="46536B"/>
                           </a:solidFill>
@@ -11642,17 +11642,17 @@
                   </a:tcPr>
                 </a:tc>
               </a:tr>
-              <a:tr h="139700">
-                <a:tc>
-                  <a:txBody>
-                    <a:bodyPr/>
-                    <a:lstStyle/>
-                    <a:p>
-                      <a:pPr indent="0" marL="0">
-                        <a:buNone/>
-                      </a:pPr>
-                      <a:r>
-                        <a:rPr lang="en-US" sz="900" dirty="0">
+              <a:tr h="127000">
+                <a:tc>
+                  <a:txBody>
+                    <a:bodyPr/>
+                    <a:lstStyle/>
+                    <a:p>
+                      <a:pPr indent="0" marL="0">
+                        <a:buNone/>
+                      </a:pPr>
+                      <a:r>
+                        <a:rPr lang="en-US" sz="800" dirty="0">
                           <a:solidFill>
                             <a:srgbClr val="46536B"/>
                           </a:solidFill>
@@ -11695,7 +11695,7 @@
                         <a:buNone/>
                       </a:pPr>
                       <a:r>
-                        <a:rPr lang="en-US" sz="900" dirty="0">
+                        <a:rPr lang="en-US" sz="800" dirty="0">
                           <a:solidFill>
                             <a:srgbClr val="46536B"/>
                           </a:solidFill>
@@ -11738,7 +11738,7 @@
                         <a:buNone/>
                       </a:pPr>
                       <a:r>
-                        <a:rPr lang="en-US" sz="900" dirty="0">
+                        <a:rPr lang="en-US" sz="800" dirty="0">
                           <a:solidFill>
                             <a:srgbClr val="46536B"/>
                           </a:solidFill>
@@ -11781,7 +11781,7 @@
                         <a:buNone/>
                       </a:pPr>
                       <a:r>
-                        <a:rPr lang="en-US" sz="900" dirty="0">
+                        <a:rPr lang="en-US" sz="800" dirty="0">
                           <a:solidFill>
                             <a:srgbClr val="46536B"/>
                           </a:solidFill>
@@ -11816,17 +11816,17 @@
                   </a:tcPr>
                 </a:tc>
               </a:tr>
-              <a:tr h="139700">
-                <a:tc>
-                  <a:txBody>
-                    <a:bodyPr/>
-                    <a:lstStyle/>
-                    <a:p>
-                      <a:pPr indent="0" marL="0">
-                        <a:buNone/>
-                      </a:pPr>
-                      <a:r>
-                        <a:rPr lang="en-US" sz="900" dirty="0">
+              <a:tr h="127000">
+                <a:tc>
+                  <a:txBody>
+                    <a:bodyPr/>
+                    <a:lstStyle/>
+                    <a:p>
+                      <a:pPr indent="0" marL="0">
+                        <a:buNone/>
+                      </a:pPr>
+                      <a:r>
+                        <a:rPr lang="en-US" sz="800" dirty="0">
                           <a:solidFill>
                             <a:srgbClr val="46536B"/>
                           </a:solidFill>
@@ -11869,7 +11869,7 @@
                         <a:buNone/>
                       </a:pPr>
                       <a:r>
-                        <a:rPr lang="en-US" sz="900" dirty="0">
+                        <a:rPr lang="en-US" sz="800" dirty="0">
                           <a:solidFill>
                             <a:srgbClr val="46536B"/>
                           </a:solidFill>
@@ -11912,7 +11912,7 @@
                         <a:buNone/>
                       </a:pPr>
                       <a:r>
-                        <a:rPr lang="en-US" sz="900" dirty="0">
+                        <a:rPr lang="en-US" sz="800" dirty="0">
                           <a:solidFill>
                             <a:srgbClr val="46536B"/>
                           </a:solidFill>
@@ -11955,7 +11955,7 @@
                         <a:buNone/>
                       </a:pPr>
                       <a:r>
-                        <a:rPr lang="en-US" sz="900" dirty="0">
+                        <a:rPr lang="en-US" sz="800" dirty="0">
                           <a:solidFill>
                             <a:srgbClr val="46536B"/>
                           </a:solidFill>
@@ -11990,17 +11990,17 @@
                   </a:tcPr>
                 </a:tc>
               </a:tr>
-              <a:tr h="139700">
-                <a:tc>
-                  <a:txBody>
-                    <a:bodyPr/>
-                    <a:lstStyle/>
-                    <a:p>
-                      <a:pPr indent="0" marL="0">
-                        <a:buNone/>
-                      </a:pPr>
-                      <a:r>
-                        <a:rPr lang="en-US" sz="900" dirty="0">
+              <a:tr h="127000">
+                <a:tc>
+                  <a:txBody>
+                    <a:bodyPr/>
+                    <a:lstStyle/>
+                    <a:p>
+                      <a:pPr indent="0" marL="0">
+                        <a:buNone/>
+                      </a:pPr>
+                      <a:r>
+                        <a:rPr lang="en-US" sz="800" dirty="0">
                           <a:solidFill>
                             <a:srgbClr val="46536B"/>
                           </a:solidFill>
@@ -12043,7 +12043,7 @@
                         <a:buNone/>
                       </a:pPr>
                       <a:r>
-                        <a:rPr lang="en-US" sz="900" dirty="0">
+                        <a:rPr lang="en-US" sz="800" dirty="0">
                           <a:solidFill>
                             <a:srgbClr val="46536B"/>
                           </a:solidFill>
@@ -12086,7 +12086,7 @@
                         <a:buNone/>
                       </a:pPr>
                       <a:r>
-                        <a:rPr lang="en-US" sz="900" dirty="0">
+                        <a:rPr lang="en-US" sz="800" dirty="0">
                           <a:solidFill>
                             <a:srgbClr val="46536B"/>
                           </a:solidFill>
@@ -12129,7 +12129,7 @@
                         <a:buNone/>
                       </a:pPr>
                       <a:r>
-                        <a:rPr lang="en-US" sz="900" dirty="0">
+                        <a:rPr lang="en-US" sz="800" dirty="0">
                           <a:solidFill>
                             <a:srgbClr val="46536B"/>
                           </a:solidFill>
@@ -12164,17 +12164,17 @@
                   </a:tcPr>
                 </a:tc>
               </a:tr>
-              <a:tr h="139700">
-                <a:tc>
-                  <a:txBody>
-                    <a:bodyPr/>
-                    <a:lstStyle/>
-                    <a:p>
-                      <a:pPr indent="0" marL="0">
-                        <a:buNone/>
-                      </a:pPr>
-                      <a:r>
-                        <a:rPr lang="en-US" sz="900" dirty="0">
+              <a:tr h="127000">
+                <a:tc>
+                  <a:txBody>
+                    <a:bodyPr/>
+                    <a:lstStyle/>
+                    <a:p>
+                      <a:pPr indent="0" marL="0">
+                        <a:buNone/>
+                      </a:pPr>
+                      <a:r>
+                        <a:rPr lang="en-US" sz="800" dirty="0">
                           <a:solidFill>
                             <a:srgbClr val="46536B"/>
                           </a:solidFill>
@@ -12217,7 +12217,7 @@
                         <a:buNone/>
                       </a:pPr>
                       <a:r>
-                        <a:rPr lang="en-US" sz="900" dirty="0">
+                        <a:rPr lang="en-US" sz="800" dirty="0">
                           <a:solidFill>
                             <a:srgbClr val="46536B"/>
                           </a:solidFill>
@@ -12260,7 +12260,7 @@
                         <a:buNone/>
                       </a:pPr>
                       <a:r>
-                        <a:rPr lang="en-US" sz="900" dirty="0">
+                        <a:rPr lang="en-US" sz="800" dirty="0">
                           <a:solidFill>
                             <a:srgbClr val="46536B"/>
                           </a:solidFill>
@@ -12303,7 +12303,7 @@
                         <a:buNone/>
                       </a:pPr>
                       <a:r>
-                        <a:rPr lang="en-US" sz="900" dirty="0">
+                        <a:rPr lang="en-US" sz="800" dirty="0">
                           <a:solidFill>
                             <a:srgbClr val="46536B"/>
                           </a:solidFill>
@@ -12338,17 +12338,17 @@
                   </a:tcPr>
                 </a:tc>
               </a:tr>
-              <a:tr h="139700">
-                <a:tc>
-                  <a:txBody>
-                    <a:bodyPr/>
-                    <a:lstStyle/>
-                    <a:p>
-                      <a:pPr indent="0" marL="0">
-                        <a:buNone/>
-                      </a:pPr>
-                      <a:r>
-                        <a:rPr lang="en-US" sz="900" dirty="0">
+              <a:tr h="127000">
+                <a:tc>
+                  <a:txBody>
+                    <a:bodyPr/>
+                    <a:lstStyle/>
+                    <a:p>
+                      <a:pPr indent="0" marL="0">
+                        <a:buNone/>
+                      </a:pPr>
+                      <a:r>
+                        <a:rPr lang="en-US" sz="800" dirty="0">
                           <a:solidFill>
                             <a:srgbClr val="46536B"/>
                           </a:solidFill>
@@ -12391,7 +12391,7 @@
                         <a:buNone/>
                       </a:pPr>
                       <a:r>
-                        <a:rPr lang="en-US" sz="900" dirty="0">
+                        <a:rPr lang="en-US" sz="800" dirty="0">
                           <a:solidFill>
                             <a:srgbClr val="46536B"/>
                           </a:solidFill>
@@ -12434,7 +12434,7 @@
                         <a:buNone/>
                       </a:pPr>
                       <a:r>
-                        <a:rPr lang="en-US" sz="900" dirty="0">
+                        <a:rPr lang="en-US" sz="800" dirty="0">
                           <a:solidFill>
                             <a:srgbClr val="46536B"/>
                           </a:solidFill>
@@ -12477,7 +12477,7 @@
                         <a:buNone/>
                       </a:pPr>
                       <a:r>
-                        <a:rPr lang="en-US" sz="900" dirty="0">
+                        <a:rPr lang="en-US" sz="800" dirty="0">
                           <a:solidFill>
                             <a:srgbClr val="46536B"/>
                           </a:solidFill>
@@ -12512,17 +12512,17 @@
                   </a:tcPr>
                 </a:tc>
               </a:tr>
-              <a:tr h="139700">
-                <a:tc>
-                  <a:txBody>
-                    <a:bodyPr/>
-                    <a:lstStyle/>
-                    <a:p>
-                      <a:pPr indent="0" marL="0">
-                        <a:buNone/>
-                      </a:pPr>
-                      <a:r>
-                        <a:rPr lang="en-US" sz="900" dirty="0">
+              <a:tr h="127000">
+                <a:tc>
+                  <a:txBody>
+                    <a:bodyPr/>
+                    <a:lstStyle/>
+                    <a:p>
+                      <a:pPr indent="0" marL="0">
+                        <a:buNone/>
+                      </a:pPr>
+                      <a:r>
+                        <a:rPr lang="en-US" sz="800" dirty="0">
                           <a:solidFill>
                             <a:srgbClr val="46536B"/>
                           </a:solidFill>
@@ -12565,7 +12565,7 @@
                         <a:buNone/>
                       </a:pPr>
                       <a:r>
-                        <a:rPr lang="en-US" sz="900" dirty="0">
+                        <a:rPr lang="en-US" sz="800" dirty="0">
                           <a:solidFill>
                             <a:srgbClr val="46536B"/>
                           </a:solidFill>
@@ -12608,7 +12608,7 @@
                         <a:buNone/>
                       </a:pPr>
                       <a:r>
-                        <a:rPr lang="en-US" sz="900" dirty="0">
+                        <a:rPr lang="en-US" sz="800" dirty="0">
                           <a:solidFill>
                             <a:srgbClr val="46536B"/>
                           </a:solidFill>
@@ -12651,7 +12651,7 @@
                         <a:buNone/>
                       </a:pPr>
                       <a:r>
-                        <a:rPr lang="en-US" sz="900" dirty="0">
+                        <a:rPr lang="en-US" sz="800" dirty="0">
                           <a:solidFill>
                             <a:srgbClr val="46536B"/>
                           </a:solidFill>
@@ -12686,17 +12686,17 @@
                   </a:tcPr>
                 </a:tc>
               </a:tr>
-              <a:tr h="139700">
-                <a:tc>
-                  <a:txBody>
-                    <a:bodyPr/>
-                    <a:lstStyle/>
-                    <a:p>
-                      <a:pPr indent="0" marL="0">
-                        <a:buNone/>
-                      </a:pPr>
-                      <a:r>
-                        <a:rPr lang="en-US" sz="900" dirty="0">
+              <a:tr h="127000">
+                <a:tc>
+                  <a:txBody>
+                    <a:bodyPr/>
+                    <a:lstStyle/>
+                    <a:p>
+                      <a:pPr indent="0" marL="0">
+                        <a:buNone/>
+                      </a:pPr>
+                      <a:r>
+                        <a:rPr lang="en-US" sz="800" dirty="0">
                           <a:solidFill>
                             <a:srgbClr val="46536B"/>
                           </a:solidFill>
@@ -12739,7 +12739,7 @@
                         <a:buNone/>
                       </a:pPr>
                       <a:r>
-                        <a:rPr lang="en-US" sz="900" dirty="0">
+                        <a:rPr lang="en-US" sz="800" dirty="0">
                           <a:solidFill>
                             <a:srgbClr val="46536B"/>
                           </a:solidFill>
@@ -12782,7 +12782,7 @@
                         <a:buNone/>
                       </a:pPr>
                       <a:r>
-                        <a:rPr lang="en-US" sz="900" dirty="0">
+                        <a:rPr lang="en-US" sz="800" dirty="0">
                           <a:solidFill>
                             <a:srgbClr val="46536B"/>
                           </a:solidFill>
@@ -12825,7 +12825,7 @@
                         <a:buNone/>
                       </a:pPr>
                       <a:r>
-                        <a:rPr lang="en-US" sz="900" dirty="0">
+                        <a:rPr lang="en-US" sz="800" dirty="0">
                           <a:solidFill>
                             <a:srgbClr val="46536B"/>
                           </a:solidFill>
@@ -12860,17 +12860,17 @@
                   </a:tcPr>
                 </a:tc>
               </a:tr>
-              <a:tr h="139700">
-                <a:tc>
-                  <a:txBody>
-                    <a:bodyPr/>
-                    <a:lstStyle/>
-                    <a:p>
-                      <a:pPr indent="0" marL="0">
-                        <a:buNone/>
-                      </a:pPr>
-                      <a:r>
-                        <a:rPr lang="en-US" sz="900" dirty="0">
+              <a:tr h="127000">
+                <a:tc>
+                  <a:txBody>
+                    <a:bodyPr/>
+                    <a:lstStyle/>
+                    <a:p>
+                      <a:pPr indent="0" marL="0">
+                        <a:buNone/>
+                      </a:pPr>
+                      <a:r>
+                        <a:rPr lang="en-US" sz="800" dirty="0">
                           <a:solidFill>
                             <a:srgbClr val="46536B"/>
                           </a:solidFill>
@@ -12913,7 +12913,7 @@
                         <a:buNone/>
                       </a:pPr>
                       <a:r>
-                        <a:rPr lang="en-US" sz="900" dirty="0">
+                        <a:rPr lang="en-US" sz="800" dirty="0">
                           <a:solidFill>
                             <a:srgbClr val="46536B"/>
                           </a:solidFill>
@@ -12956,7 +12956,7 @@
                         <a:buNone/>
                       </a:pPr>
                       <a:r>
-                        <a:rPr lang="en-US" sz="900" dirty="0">
+                        <a:rPr lang="en-US" sz="800" dirty="0">
                           <a:solidFill>
                             <a:srgbClr val="46536B"/>
                           </a:solidFill>
@@ -12999,7 +12999,7 @@
                         <a:buNone/>
                       </a:pPr>
                       <a:r>
-                        <a:rPr lang="en-US" sz="900" dirty="0">
+                        <a:rPr lang="en-US" sz="800" dirty="0">
                           <a:solidFill>
                             <a:srgbClr val="46536B"/>
                           </a:solidFill>
@@ -13034,17 +13034,17 @@
                   </a:tcPr>
                 </a:tc>
               </a:tr>
-              <a:tr h="139700">
-                <a:tc>
-                  <a:txBody>
-                    <a:bodyPr/>
-                    <a:lstStyle/>
-                    <a:p>
-                      <a:pPr indent="0" marL="0">
-                        <a:buNone/>
-                      </a:pPr>
-                      <a:r>
-                        <a:rPr lang="en-US" sz="900" dirty="0">
+              <a:tr h="127000">
+                <a:tc>
+                  <a:txBody>
+                    <a:bodyPr/>
+                    <a:lstStyle/>
+                    <a:p>
+                      <a:pPr indent="0" marL="0">
+                        <a:buNone/>
+                      </a:pPr>
+                      <a:r>
+                        <a:rPr lang="en-US" sz="800" dirty="0">
                           <a:solidFill>
                             <a:srgbClr val="46536B"/>
                           </a:solidFill>
@@ -13087,7 +13087,7 @@
                         <a:buNone/>
                       </a:pPr>
                       <a:r>
-                        <a:rPr lang="en-US" sz="900" dirty="0">
+                        <a:rPr lang="en-US" sz="800" dirty="0">
                           <a:solidFill>
                             <a:srgbClr val="46536B"/>
                           </a:solidFill>
@@ -13130,7 +13130,7 @@
                         <a:buNone/>
                       </a:pPr>
                       <a:r>
-                        <a:rPr lang="en-US" sz="900" dirty="0">
+                        <a:rPr lang="en-US" sz="800" dirty="0">
                           <a:solidFill>
                             <a:srgbClr val="46536B"/>
                           </a:solidFill>
@@ -13173,7 +13173,7 @@
                         <a:buNone/>
                       </a:pPr>
                       <a:r>
-                        <a:rPr lang="en-US" sz="900" dirty="0">
+                        <a:rPr lang="en-US" sz="800" dirty="0">
                           <a:solidFill>
                             <a:srgbClr val="46536B"/>
                           </a:solidFill>
@@ -13208,17 +13208,17 @@
                   </a:tcPr>
                 </a:tc>
               </a:tr>
-              <a:tr h="139700">
-                <a:tc>
-                  <a:txBody>
-                    <a:bodyPr/>
-                    <a:lstStyle/>
-                    <a:p>
-                      <a:pPr indent="0" marL="0">
-                        <a:buNone/>
-                      </a:pPr>
-                      <a:r>
-                        <a:rPr lang="en-US" sz="900" dirty="0">
+              <a:tr h="127000">
+                <a:tc>
+                  <a:txBody>
+                    <a:bodyPr/>
+                    <a:lstStyle/>
+                    <a:p>
+                      <a:pPr indent="0" marL="0">
+                        <a:buNone/>
+                      </a:pPr>
+                      <a:r>
+                        <a:rPr lang="en-US" sz="800" dirty="0">
                           <a:solidFill>
                             <a:srgbClr val="46536B"/>
                           </a:solidFill>
@@ -13261,7 +13261,7 @@
                         <a:buNone/>
                       </a:pPr>
                       <a:r>
-                        <a:rPr lang="en-US" sz="900" dirty="0">
+                        <a:rPr lang="en-US" sz="800" dirty="0">
                           <a:solidFill>
                             <a:srgbClr val="46536B"/>
                           </a:solidFill>
@@ -13304,7 +13304,7 @@
                         <a:buNone/>
                       </a:pPr>
                       <a:r>
-                        <a:rPr lang="en-US" sz="900" dirty="0">
+                        <a:rPr lang="en-US" sz="800" dirty="0">
                           <a:solidFill>
                             <a:srgbClr val="46536B"/>
                           </a:solidFill>
@@ -13347,7 +13347,7 @@
                         <a:buNone/>
                       </a:pPr>
                       <a:r>
-                        <a:rPr lang="en-US" sz="900" dirty="0">
+                        <a:rPr lang="en-US" sz="800" dirty="0">
                           <a:solidFill>
                             <a:srgbClr val="46536B"/>
                           </a:solidFill>
@@ -13382,17 +13382,17 @@
                   </a:tcPr>
                 </a:tc>
               </a:tr>
-              <a:tr h="139700">
-                <a:tc>
-                  <a:txBody>
-                    <a:bodyPr/>
-                    <a:lstStyle/>
-                    <a:p>
-                      <a:pPr indent="0" marL="0">
-                        <a:buNone/>
-                      </a:pPr>
-                      <a:r>
-                        <a:rPr lang="en-US" sz="900" dirty="0">
+              <a:tr h="127000">
+                <a:tc>
+                  <a:txBody>
+                    <a:bodyPr/>
+                    <a:lstStyle/>
+                    <a:p>
+                      <a:pPr indent="0" marL="0">
+                        <a:buNone/>
+                      </a:pPr>
+                      <a:r>
+                        <a:rPr lang="en-US" sz="800" dirty="0">
                           <a:solidFill>
                             <a:srgbClr val="46536B"/>
                           </a:solidFill>
@@ -13435,7 +13435,7 @@
                         <a:buNone/>
                       </a:pPr>
                       <a:r>
-                        <a:rPr lang="en-US" sz="900" dirty="0">
+                        <a:rPr lang="en-US" sz="800" dirty="0">
                           <a:solidFill>
                             <a:srgbClr val="46536B"/>
                           </a:solidFill>
@@ -13478,7 +13478,7 @@
                         <a:buNone/>
                       </a:pPr>
                       <a:r>
-                        <a:rPr lang="en-US" sz="900" dirty="0">
+                        <a:rPr lang="en-US" sz="800" dirty="0">
                           <a:solidFill>
                             <a:srgbClr val="46536B"/>
                           </a:solidFill>
@@ -13521,7 +13521,7 @@
                         <a:buNone/>
                       </a:pPr>
                       <a:r>
-                        <a:rPr lang="en-US" sz="900" dirty="0">
+                        <a:rPr lang="en-US" sz="800" dirty="0">
                           <a:solidFill>
                             <a:srgbClr val="46536B"/>
                           </a:solidFill>
@@ -13556,17 +13556,17 @@
                   </a:tcPr>
                 </a:tc>
               </a:tr>
-              <a:tr h="139700">
-                <a:tc>
-                  <a:txBody>
-                    <a:bodyPr/>
-                    <a:lstStyle/>
-                    <a:p>
-                      <a:pPr indent="0" marL="0">
-                        <a:buNone/>
-                      </a:pPr>
-                      <a:r>
-                        <a:rPr lang="en-US" sz="900" dirty="0">
+              <a:tr h="127000">
+                <a:tc>
+                  <a:txBody>
+                    <a:bodyPr/>
+                    <a:lstStyle/>
+                    <a:p>
+                      <a:pPr indent="0" marL="0">
+                        <a:buNone/>
+                      </a:pPr>
+                      <a:r>
+                        <a:rPr lang="en-US" sz="800" dirty="0">
                           <a:solidFill>
                             <a:srgbClr val="46536B"/>
                           </a:solidFill>
@@ -13574,6 +13574,1050 @@
                           <a:ea typeface="Malgun Gothic" pitchFamily="34" charset="-122"/>
                           <a:cs typeface="Malgun Gothic" pitchFamily="34" charset="-120"/>
                         </a:rPr>
+                        <a:t>오픈소스</a:t>
+                      </a:r>
+                      <a:endParaRPr lang="en-US" sz="1200" dirty="0"/>
+                    </a:p>
+                  </a:txBody>
+                  <a:tcPr marL="88900" marR="88900" marT="12700" marB="12700" anchor="t">
+                    <a:lnL w="0" cap="flat" cmpd="sng" algn="ctr">
+                      <a:noFill/>
+                    </a:lnL>
+                    <a:lnR w="0" cap="flat" cmpd="sng" algn="ctr">
+                      <a:noFill/>
+                    </a:lnR>
+                    <a:lnT w="0" cap="flat" cmpd="sng" algn="ctr">
+                      <a:noFill/>
+                    </a:lnT>
+                    <a:lnB w="9525" cap="flat" cmpd="sng" algn="ctr">
+                      <a:solidFill>
+                        <a:srgbClr val="D9E0EC"/>
+                      </a:solidFill>
+                      <a:prstDash val="solid"/>
+                      <a:round/>
+                      <a:headEnd type="none" w="med" len="med"/>
+                      <a:tailEnd type="none" w="med" len="med"/>
+                    </a:lnB>
+                  </a:tcPr>
+                </a:tc>
+                <a:tc>
+                  <a:txBody>
+                    <a:bodyPr/>
+                    <a:lstStyle/>
+                    <a:p>
+                      <a:pPr indent="0" marL="0">
+                        <a:buNone/>
+                      </a:pPr>
+                      <a:r>
+                        <a:rPr lang="en-US" sz="800" dirty="0">
+                          <a:solidFill>
+                            <a:srgbClr val="46536B"/>
+                          </a:solidFill>
+                          <a:latin typeface="Malgun Gothic" pitchFamily="34" charset="0"/>
+                          <a:ea typeface="Malgun Gothic" pitchFamily="34" charset="-122"/>
+                          <a:cs typeface="Malgun Gothic" pitchFamily="34" charset="-120"/>
+                        </a:rPr>
+                        <a:t>vLLM 0.21, qwen-tts 0.1.1, Modal 클라이언트, diffusers 0.36</a:t>
+                      </a:r>
+                      <a:endParaRPr lang="en-US" sz="1200" dirty="0"/>
+                    </a:p>
+                  </a:txBody>
+                  <a:tcPr marL="88900" marR="88900" marT="12700" marB="12700" anchor="t">
+                    <a:lnL w="0" cap="flat" cmpd="sng" algn="ctr">
+                      <a:noFill/>
+                    </a:lnL>
+                    <a:lnR w="0" cap="flat" cmpd="sng" algn="ctr">
+                      <a:noFill/>
+                    </a:lnR>
+                    <a:lnT w="0" cap="flat" cmpd="sng" algn="ctr">
+                      <a:noFill/>
+                    </a:lnT>
+                    <a:lnB w="9525" cap="flat" cmpd="sng" algn="ctr">
+                      <a:solidFill>
+                        <a:srgbClr val="D9E0EC"/>
+                      </a:solidFill>
+                      <a:prstDash val="solid"/>
+                      <a:round/>
+                      <a:headEnd type="none" w="med" len="med"/>
+                      <a:tailEnd type="none" w="med" len="med"/>
+                    </a:lnB>
+                  </a:tcPr>
+                </a:tc>
+                <a:tc>
+                  <a:txBody>
+                    <a:bodyPr/>
+                    <a:lstStyle/>
+                    <a:p>
+                      <a:pPr indent="0" marL="0">
+                        <a:buNone/>
+                      </a:pPr>
+                      <a:r>
+                        <a:rPr lang="en-US" sz="800" dirty="0">
+                          <a:solidFill>
+                            <a:srgbClr val="46536B"/>
+                          </a:solidFill>
+                          <a:latin typeface="Malgun Gothic" pitchFamily="34" charset="0"/>
+                          <a:ea typeface="Malgun Gothic" pitchFamily="34" charset="-122"/>
+                          <a:cs typeface="Malgun Gothic" pitchFamily="34" charset="-120"/>
+                        </a:rPr>
+                        <a:t>GPU 서빙, 음성 합성, 배포, 영상 생성</a:t>
+                      </a:r>
+                      <a:endParaRPr lang="en-US" sz="1200" dirty="0"/>
+                    </a:p>
+                  </a:txBody>
+                  <a:tcPr marL="88900" marR="88900" marT="12700" marB="12700" anchor="t">
+                    <a:lnL w="0" cap="flat" cmpd="sng" algn="ctr">
+                      <a:noFill/>
+                    </a:lnL>
+                    <a:lnR w="0" cap="flat" cmpd="sng" algn="ctr">
+                      <a:noFill/>
+                    </a:lnR>
+                    <a:lnT w="0" cap="flat" cmpd="sng" algn="ctr">
+                      <a:noFill/>
+                    </a:lnT>
+                    <a:lnB w="9525" cap="flat" cmpd="sng" algn="ctr">
+                      <a:solidFill>
+                        <a:srgbClr val="D9E0EC"/>
+                      </a:solidFill>
+                      <a:prstDash val="solid"/>
+                      <a:round/>
+                      <a:headEnd type="none" w="med" len="med"/>
+                      <a:tailEnd type="none" w="med" len="med"/>
+                    </a:lnB>
+                  </a:tcPr>
+                </a:tc>
+                <a:tc>
+                  <a:txBody>
+                    <a:bodyPr/>
+                    <a:lstStyle/>
+                    <a:p>
+                      <a:pPr indent="0" marL="0">
+                        <a:buNone/>
+                      </a:pPr>
+                      <a:r>
+                        <a:rPr lang="en-US" sz="800" dirty="0">
+                          <a:solidFill>
+                            <a:srgbClr val="46536B"/>
+                          </a:solidFill>
+                          <a:latin typeface="Malgun Gothic" pitchFamily="34" charset="0"/>
+                          <a:ea typeface="Malgun Gothic" pitchFamily="34" charset="-122"/>
+                          <a:cs typeface="Malgun Gothic" pitchFamily="34" charset="-120"/>
+                        </a:rPr>
+                        <a:t>Apache 2.0</a:t>
+                      </a:r>
+                      <a:endParaRPr lang="en-US" sz="1200" dirty="0"/>
+                    </a:p>
+                  </a:txBody>
+                  <a:tcPr marL="88900" marR="88900" marT="12700" marB="12700" anchor="t">
+                    <a:lnL w="0" cap="flat" cmpd="sng" algn="ctr">
+                      <a:noFill/>
+                    </a:lnL>
+                    <a:lnR w="0" cap="flat" cmpd="sng" algn="ctr">
+                      <a:noFill/>
+                    </a:lnR>
+                    <a:lnT w="0" cap="flat" cmpd="sng" algn="ctr">
+                      <a:noFill/>
+                    </a:lnT>
+                    <a:lnB w="9525" cap="flat" cmpd="sng" algn="ctr">
+                      <a:solidFill>
+                        <a:srgbClr val="D9E0EC"/>
+                      </a:solidFill>
+                      <a:prstDash val="solid"/>
+                      <a:round/>
+                      <a:headEnd type="none" w="med" len="med"/>
+                      <a:tailEnd type="none" w="med" len="med"/>
+                    </a:lnB>
+                  </a:tcPr>
+                </a:tc>
+              </a:tr>
+              <a:tr h="127000">
+                <a:tc>
+                  <a:txBody>
+                    <a:bodyPr/>
+                    <a:lstStyle/>
+                    <a:p>
+                      <a:pPr indent="0" marL="0">
+                        <a:buNone/>
+                      </a:pPr>
+                      <a:r>
+                        <a:rPr lang="en-US" sz="800" dirty="0">
+                          <a:solidFill>
+                            <a:srgbClr val="46536B"/>
+                          </a:solidFill>
+                          <a:latin typeface="Malgun Gothic" pitchFamily="34" charset="0"/>
+                          <a:ea typeface="Malgun Gothic" pitchFamily="34" charset="-122"/>
+                          <a:cs typeface="Malgun Gothic" pitchFamily="34" charset="-120"/>
+                        </a:rPr>
+                        <a:t>오픈소스</a:t>
+                      </a:r>
+                      <a:endParaRPr lang="en-US" sz="1200" dirty="0"/>
+                    </a:p>
+                  </a:txBody>
+                  <a:tcPr marL="88900" marR="88900" marT="12700" marB="12700" anchor="t">
+                    <a:lnL w="0" cap="flat" cmpd="sng" algn="ctr">
+                      <a:noFill/>
+                    </a:lnL>
+                    <a:lnR w="0" cap="flat" cmpd="sng" algn="ctr">
+                      <a:noFill/>
+                    </a:lnR>
+                    <a:lnT w="0" cap="flat" cmpd="sng" algn="ctr">
+                      <a:noFill/>
+                    </a:lnT>
+                    <a:lnB w="9525" cap="flat" cmpd="sng" algn="ctr">
+                      <a:solidFill>
+                        <a:srgbClr val="D9E0EC"/>
+                      </a:solidFill>
+                      <a:prstDash val="solid"/>
+                      <a:round/>
+                      <a:headEnd type="none" w="med" len="med"/>
+                      <a:tailEnd type="none" w="med" len="med"/>
+                    </a:lnB>
+                  </a:tcPr>
+                </a:tc>
+                <a:tc>
+                  <a:txBody>
+                    <a:bodyPr/>
+                    <a:lstStyle/>
+                    <a:p>
+                      <a:pPr indent="0" marL="0">
+                        <a:buNone/>
+                      </a:pPr>
+                      <a:r>
+                        <a:rPr lang="en-US" sz="800" dirty="0">
+                          <a:solidFill>
+                            <a:srgbClr val="46536B"/>
+                          </a:solidFill>
+                          <a:latin typeface="Malgun Gothic" pitchFamily="34" charset="0"/>
+                          <a:ea typeface="Malgun Gothic" pitchFamily="34" charset="-122"/>
+                          <a:cs typeface="Malgun Gothic" pitchFamily="34" charset="-120"/>
+                        </a:rPr>
+                        <a:t>librosa, soundfile, pyloudnorm, omegaconf, einops, imageio</a:t>
+                      </a:r>
+                      <a:endParaRPr lang="en-US" sz="1200" dirty="0"/>
+                    </a:p>
+                  </a:txBody>
+                  <a:tcPr marL="88900" marR="88900" marT="12700" marB="12700" anchor="t">
+                    <a:lnL w="0" cap="flat" cmpd="sng" algn="ctr">
+                      <a:noFill/>
+                    </a:lnL>
+                    <a:lnR w="0" cap="flat" cmpd="sng" algn="ctr">
+                      <a:noFill/>
+                    </a:lnR>
+                    <a:lnT w="0" cap="flat" cmpd="sng" algn="ctr">
+                      <a:noFill/>
+                    </a:lnT>
+                    <a:lnB w="9525" cap="flat" cmpd="sng" algn="ctr">
+                      <a:solidFill>
+                        <a:srgbClr val="D9E0EC"/>
+                      </a:solidFill>
+                      <a:prstDash val="solid"/>
+                      <a:round/>
+                      <a:headEnd type="none" w="med" len="med"/>
+                      <a:tailEnd type="none" w="med" len="med"/>
+                    </a:lnB>
+                  </a:tcPr>
+                </a:tc>
+                <a:tc>
+                  <a:txBody>
+                    <a:bodyPr/>
+                    <a:lstStyle/>
+                    <a:p>
+                      <a:pPr indent="0" marL="0">
+                        <a:buNone/>
+                      </a:pPr>
+                      <a:r>
+                        <a:rPr lang="en-US" sz="800" dirty="0">
+                          <a:solidFill>
+                            <a:srgbClr val="46536B"/>
+                          </a:solidFill>
+                          <a:latin typeface="Malgun Gothic" pitchFamily="34" charset="0"/>
+                          <a:ea typeface="Malgun Gothic" pitchFamily="34" charset="-122"/>
+                          <a:cs typeface="Malgun Gothic" pitchFamily="34" charset="-120"/>
+                        </a:rPr>
+                        <a:t>GPU 콘텐츠 생성 보조</a:t>
+                      </a:r>
+                      <a:endParaRPr lang="en-US" sz="1200" dirty="0"/>
+                    </a:p>
+                  </a:txBody>
+                  <a:tcPr marL="88900" marR="88900" marT="12700" marB="12700" anchor="t">
+                    <a:lnL w="0" cap="flat" cmpd="sng" algn="ctr">
+                      <a:noFill/>
+                    </a:lnL>
+                    <a:lnR w="0" cap="flat" cmpd="sng" algn="ctr">
+                      <a:noFill/>
+                    </a:lnR>
+                    <a:lnT w="0" cap="flat" cmpd="sng" algn="ctr">
+                      <a:noFill/>
+                    </a:lnT>
+                    <a:lnB w="9525" cap="flat" cmpd="sng" algn="ctr">
+                      <a:solidFill>
+                        <a:srgbClr val="D9E0EC"/>
+                      </a:solidFill>
+                      <a:prstDash val="solid"/>
+                      <a:round/>
+                      <a:headEnd type="none" w="med" len="med"/>
+                      <a:tailEnd type="none" w="med" len="med"/>
+                    </a:lnB>
+                  </a:tcPr>
+                </a:tc>
+                <a:tc>
+                  <a:txBody>
+                    <a:bodyPr/>
+                    <a:lstStyle/>
+                    <a:p>
+                      <a:pPr indent="0" marL="0">
+                        <a:buNone/>
+                      </a:pPr>
+                      <a:r>
+                        <a:rPr lang="en-US" sz="800" dirty="0">
+                          <a:solidFill>
+                            <a:srgbClr val="46536B"/>
+                          </a:solidFill>
+                          <a:latin typeface="Malgun Gothic" pitchFamily="34" charset="0"/>
+                          <a:ea typeface="Malgun Gothic" pitchFamily="34" charset="-122"/>
+                          <a:cs typeface="Malgun Gothic" pitchFamily="34" charset="-120"/>
+                        </a:rPr>
+                        <a:t>ISC, BSD-3, MIT, BSD-3, MIT, BSD-2</a:t>
+                      </a:r>
+                      <a:endParaRPr lang="en-US" sz="1200" dirty="0"/>
+                    </a:p>
+                  </a:txBody>
+                  <a:tcPr marL="88900" marR="88900" marT="12700" marB="12700" anchor="t">
+                    <a:lnL w="0" cap="flat" cmpd="sng" algn="ctr">
+                      <a:noFill/>
+                    </a:lnL>
+                    <a:lnR w="0" cap="flat" cmpd="sng" algn="ctr">
+                      <a:noFill/>
+                    </a:lnR>
+                    <a:lnT w="0" cap="flat" cmpd="sng" algn="ctr">
+                      <a:noFill/>
+                    </a:lnT>
+                    <a:lnB w="9525" cap="flat" cmpd="sng" algn="ctr">
+                      <a:solidFill>
+                        <a:srgbClr val="D9E0EC"/>
+                      </a:solidFill>
+                      <a:prstDash val="solid"/>
+                      <a:round/>
+                      <a:headEnd type="none" w="med" len="med"/>
+                      <a:tailEnd type="none" w="med" len="med"/>
+                    </a:lnB>
+                  </a:tcPr>
+                </a:tc>
+              </a:tr>
+              <a:tr h="127000">
+                <a:tc>
+                  <a:txBody>
+                    <a:bodyPr/>
+                    <a:lstStyle/>
+                    <a:p>
+                      <a:pPr indent="0" marL="0">
+                        <a:buNone/>
+                      </a:pPr>
+                      <a:r>
+                        <a:rPr lang="en-US" sz="800" dirty="0">
+                          <a:solidFill>
+                            <a:srgbClr val="46536B"/>
+                          </a:solidFill>
+                          <a:latin typeface="Malgun Gothic" pitchFamily="34" charset="0"/>
+                          <a:ea typeface="Malgun Gothic" pitchFamily="34" charset="-122"/>
+                          <a:cs typeface="Malgun Gothic" pitchFamily="34" charset="-120"/>
+                        </a:rPr>
+                        <a:t>오픈소스</a:t>
+                      </a:r>
+                      <a:endParaRPr lang="en-US" sz="1200" dirty="0"/>
+                    </a:p>
+                  </a:txBody>
+                  <a:tcPr marL="88900" marR="88900" marT="12700" marB="12700" anchor="t">
+                    <a:lnL w="0" cap="flat" cmpd="sng" algn="ctr">
+                      <a:noFill/>
+                    </a:lnL>
+                    <a:lnR w="0" cap="flat" cmpd="sng" algn="ctr">
+                      <a:noFill/>
+                    </a:lnR>
+                    <a:lnT w="0" cap="flat" cmpd="sng" algn="ctr">
+                      <a:noFill/>
+                    </a:lnT>
+                    <a:lnB w="9525" cap="flat" cmpd="sng" algn="ctr">
+                      <a:solidFill>
+                        <a:srgbClr val="D9E0EC"/>
+                      </a:solidFill>
+                      <a:prstDash val="solid"/>
+                      <a:round/>
+                      <a:headEnd type="none" w="med" len="med"/>
+                      <a:tailEnd type="none" w="med" len="med"/>
+                    </a:lnB>
+                  </a:tcPr>
+                </a:tc>
+                <a:tc>
+                  <a:txBody>
+                    <a:bodyPr/>
+                    <a:lstStyle/>
+                    <a:p>
+                      <a:pPr indent="0" marL="0">
+                        <a:buNone/>
+                      </a:pPr>
+                      <a:r>
+                        <a:rPr lang="en-US" sz="800" dirty="0">
+                          <a:solidFill>
+                            <a:srgbClr val="46536B"/>
+                          </a:solidFill>
+                          <a:latin typeface="Malgun Gothic" pitchFamily="34" charset="0"/>
+                          <a:ea typeface="Malgun Gothic" pitchFamily="34" charset="-122"/>
+                          <a:cs typeface="Malgun Gothic" pitchFamily="34" charset="-120"/>
+                        </a:rPr>
+                        <a:t>kakaocorp/kanana-1.5-8b-instruct-2505</a:t>
+                      </a:r>
+                      <a:endParaRPr lang="en-US" sz="1200" dirty="0"/>
+                    </a:p>
+                  </a:txBody>
+                  <a:tcPr marL="88900" marR="88900" marT="12700" marB="12700" anchor="t">
+                    <a:lnL w="0" cap="flat" cmpd="sng" algn="ctr">
+                      <a:noFill/>
+                    </a:lnL>
+                    <a:lnR w="0" cap="flat" cmpd="sng" algn="ctr">
+                      <a:noFill/>
+                    </a:lnR>
+                    <a:lnT w="0" cap="flat" cmpd="sng" algn="ctr">
+                      <a:noFill/>
+                    </a:lnT>
+                    <a:lnB w="9525" cap="flat" cmpd="sng" algn="ctr">
+                      <a:solidFill>
+                        <a:srgbClr val="D9E0EC"/>
+                      </a:solidFill>
+                      <a:prstDash val="solid"/>
+                      <a:round/>
+                      <a:headEnd type="none" w="med" len="med"/>
+                      <a:tailEnd type="none" w="med" len="med"/>
+                    </a:lnB>
+                  </a:tcPr>
+                </a:tc>
+                <a:tc>
+                  <a:txBody>
+                    <a:bodyPr/>
+                    <a:lstStyle/>
+                    <a:p>
+                      <a:pPr indent="0" marL="0">
+                        <a:buNone/>
+                      </a:pPr>
+                      <a:r>
+                        <a:rPr lang="en-US" sz="800" dirty="0">
+                          <a:solidFill>
+                            <a:srgbClr val="46536B"/>
+                          </a:solidFill>
+                          <a:latin typeface="Malgun Gothic" pitchFamily="34" charset="0"/>
+                          <a:ea typeface="Malgun Gothic" pitchFamily="34" charset="-122"/>
+                          <a:cs typeface="Malgun Gothic" pitchFamily="34" charset="-120"/>
+                        </a:rPr>
+                        <a:t>모의 훈련 답 판정 LLM</a:t>
+                      </a:r>
+                      <a:endParaRPr lang="en-US" sz="1200" dirty="0"/>
+                    </a:p>
+                  </a:txBody>
+                  <a:tcPr marL="88900" marR="88900" marT="12700" marB="12700" anchor="t">
+                    <a:lnL w="0" cap="flat" cmpd="sng" algn="ctr">
+                      <a:noFill/>
+                    </a:lnL>
+                    <a:lnR w="0" cap="flat" cmpd="sng" algn="ctr">
+                      <a:noFill/>
+                    </a:lnR>
+                    <a:lnT w="0" cap="flat" cmpd="sng" algn="ctr">
+                      <a:noFill/>
+                    </a:lnT>
+                    <a:lnB w="9525" cap="flat" cmpd="sng" algn="ctr">
+                      <a:solidFill>
+                        <a:srgbClr val="D9E0EC"/>
+                      </a:solidFill>
+                      <a:prstDash val="solid"/>
+                      <a:round/>
+                      <a:headEnd type="none" w="med" len="med"/>
+                      <a:tailEnd type="none" w="med" len="med"/>
+                    </a:lnB>
+                  </a:tcPr>
+                </a:tc>
+                <a:tc>
+                  <a:txBody>
+                    <a:bodyPr/>
+                    <a:lstStyle/>
+                    <a:p>
+                      <a:pPr indent="0" marL="0">
+                        <a:buNone/>
+                      </a:pPr>
+                      <a:r>
+                        <a:rPr lang="en-US" sz="800" dirty="0">
+                          <a:solidFill>
+                            <a:srgbClr val="46536B"/>
+                          </a:solidFill>
+                          <a:latin typeface="Malgun Gothic" pitchFamily="34" charset="0"/>
+                          <a:ea typeface="Malgun Gothic" pitchFamily="34" charset="-122"/>
+                          <a:cs typeface="Malgun Gothic" pitchFamily="34" charset="-120"/>
+                        </a:rPr>
+                        <a:t>Apache 2.0</a:t>
+                      </a:r>
+                      <a:endParaRPr lang="en-US" sz="1200" dirty="0"/>
+                    </a:p>
+                  </a:txBody>
+                  <a:tcPr marL="88900" marR="88900" marT="12700" marB="12700" anchor="t">
+                    <a:lnL w="0" cap="flat" cmpd="sng" algn="ctr">
+                      <a:noFill/>
+                    </a:lnL>
+                    <a:lnR w="0" cap="flat" cmpd="sng" algn="ctr">
+                      <a:noFill/>
+                    </a:lnR>
+                    <a:lnT w="0" cap="flat" cmpd="sng" algn="ctr">
+                      <a:noFill/>
+                    </a:lnT>
+                    <a:lnB w="9525" cap="flat" cmpd="sng" algn="ctr">
+                      <a:solidFill>
+                        <a:srgbClr val="D9E0EC"/>
+                      </a:solidFill>
+                      <a:prstDash val="solid"/>
+                      <a:round/>
+                      <a:headEnd type="none" w="med" len="med"/>
+                      <a:tailEnd type="none" w="med" len="med"/>
+                    </a:lnB>
+                  </a:tcPr>
+                </a:tc>
+              </a:tr>
+              <a:tr h="127000">
+                <a:tc>
+                  <a:txBody>
+                    <a:bodyPr/>
+                    <a:lstStyle/>
+                    <a:p>
+                      <a:pPr indent="0" marL="0">
+                        <a:buNone/>
+                      </a:pPr>
+                      <a:r>
+                        <a:rPr lang="en-US" sz="800" dirty="0">
+                          <a:solidFill>
+                            <a:srgbClr val="46536B"/>
+                          </a:solidFill>
+                          <a:latin typeface="Malgun Gothic" pitchFamily="34" charset="0"/>
+                          <a:ea typeface="Malgun Gothic" pitchFamily="34" charset="-122"/>
+                          <a:cs typeface="Malgun Gothic" pitchFamily="34" charset="-120"/>
+                        </a:rPr>
+                        <a:t>오픈소스</a:t>
+                      </a:r>
+                      <a:endParaRPr lang="en-US" sz="1200" dirty="0"/>
+                    </a:p>
+                  </a:txBody>
+                  <a:tcPr marL="88900" marR="88900" marT="12700" marB="12700" anchor="t">
+                    <a:lnL w="0" cap="flat" cmpd="sng" algn="ctr">
+                      <a:noFill/>
+                    </a:lnL>
+                    <a:lnR w="0" cap="flat" cmpd="sng" algn="ctr">
+                      <a:noFill/>
+                    </a:lnR>
+                    <a:lnT w="0" cap="flat" cmpd="sng" algn="ctr">
+                      <a:noFill/>
+                    </a:lnT>
+                    <a:lnB w="9525" cap="flat" cmpd="sng" algn="ctr">
+                      <a:solidFill>
+                        <a:srgbClr val="D9E0EC"/>
+                      </a:solidFill>
+                      <a:prstDash val="solid"/>
+                      <a:round/>
+                      <a:headEnd type="none" w="med" len="med"/>
+                      <a:tailEnd type="none" w="med" len="med"/>
+                    </a:lnB>
+                  </a:tcPr>
+                </a:tc>
+                <a:tc>
+                  <a:txBody>
+                    <a:bodyPr/>
+                    <a:lstStyle/>
+                    <a:p>
+                      <a:pPr indent="0" marL="0">
+                        <a:buNone/>
+                      </a:pPr>
+                      <a:r>
+                        <a:rPr lang="en-US" sz="800" dirty="0">
+                          <a:solidFill>
+                            <a:srgbClr val="46536B"/>
+                          </a:solidFill>
+                          <a:latin typeface="Malgun Gothic" pitchFamily="34" charset="0"/>
+                          <a:ea typeface="Malgun Gothic" pitchFamily="34" charset="-122"/>
+                          <a:cs typeface="Malgun Gothic" pitchFamily="34" charset="-120"/>
+                        </a:rPr>
+                        <a:t>Qwen3-TTS-12Hz-1.7B VoiceDesign·Base</a:t>
+                      </a:r>
+                      <a:endParaRPr lang="en-US" sz="1200" dirty="0"/>
+                    </a:p>
+                  </a:txBody>
+                  <a:tcPr marL="88900" marR="88900" marT="12700" marB="12700" anchor="t">
+                    <a:lnL w="0" cap="flat" cmpd="sng" algn="ctr">
+                      <a:noFill/>
+                    </a:lnL>
+                    <a:lnR w="0" cap="flat" cmpd="sng" algn="ctr">
+                      <a:noFill/>
+                    </a:lnR>
+                    <a:lnT w="0" cap="flat" cmpd="sng" algn="ctr">
+                      <a:noFill/>
+                    </a:lnT>
+                    <a:lnB w="9525" cap="flat" cmpd="sng" algn="ctr">
+                      <a:solidFill>
+                        <a:srgbClr val="D9E0EC"/>
+                      </a:solidFill>
+                      <a:prstDash val="solid"/>
+                      <a:round/>
+                      <a:headEnd type="none" w="med" len="med"/>
+                      <a:tailEnd type="none" w="med" len="med"/>
+                    </a:lnB>
+                  </a:tcPr>
+                </a:tc>
+                <a:tc>
+                  <a:txBody>
+                    <a:bodyPr/>
+                    <a:lstStyle/>
+                    <a:p>
+                      <a:pPr indent="0" marL="0">
+                        <a:buNone/>
+                      </a:pPr>
+                      <a:r>
+                        <a:rPr lang="en-US" sz="800" dirty="0">
+                          <a:solidFill>
+                            <a:srgbClr val="46536B"/>
+                          </a:solidFill>
+                          <a:latin typeface="Malgun Gothic" pitchFamily="34" charset="0"/>
+                          <a:ea typeface="Malgun Gothic" pitchFamily="34" charset="-122"/>
+                          <a:cs typeface="Malgun Gothic" pitchFamily="34" charset="-120"/>
+                        </a:rPr>
+                        <a:t>훈련 대사 음성 합성</a:t>
+                      </a:r>
+                      <a:endParaRPr lang="en-US" sz="1200" dirty="0"/>
+                    </a:p>
+                  </a:txBody>
+                  <a:tcPr marL="88900" marR="88900" marT="12700" marB="12700" anchor="t">
+                    <a:lnL w="0" cap="flat" cmpd="sng" algn="ctr">
+                      <a:noFill/>
+                    </a:lnL>
+                    <a:lnR w="0" cap="flat" cmpd="sng" algn="ctr">
+                      <a:noFill/>
+                    </a:lnR>
+                    <a:lnT w="0" cap="flat" cmpd="sng" algn="ctr">
+                      <a:noFill/>
+                    </a:lnT>
+                    <a:lnB w="9525" cap="flat" cmpd="sng" algn="ctr">
+                      <a:solidFill>
+                        <a:srgbClr val="D9E0EC"/>
+                      </a:solidFill>
+                      <a:prstDash val="solid"/>
+                      <a:round/>
+                      <a:headEnd type="none" w="med" len="med"/>
+                      <a:tailEnd type="none" w="med" len="med"/>
+                    </a:lnB>
+                  </a:tcPr>
+                </a:tc>
+                <a:tc>
+                  <a:txBody>
+                    <a:bodyPr/>
+                    <a:lstStyle/>
+                    <a:p>
+                      <a:pPr indent="0" marL="0">
+                        <a:buNone/>
+                      </a:pPr>
+                      <a:r>
+                        <a:rPr lang="en-US" sz="800" dirty="0">
+                          <a:solidFill>
+                            <a:srgbClr val="46536B"/>
+                          </a:solidFill>
+                          <a:latin typeface="Malgun Gothic" pitchFamily="34" charset="0"/>
+                          <a:ea typeface="Malgun Gothic" pitchFamily="34" charset="-122"/>
+                          <a:cs typeface="Malgun Gothic" pitchFamily="34" charset="-120"/>
+                        </a:rPr>
+                        <a:t>Apache 2.0</a:t>
+                      </a:r>
+                      <a:endParaRPr lang="en-US" sz="1200" dirty="0"/>
+                    </a:p>
+                  </a:txBody>
+                  <a:tcPr marL="88900" marR="88900" marT="12700" marB="12700" anchor="t">
+                    <a:lnL w="0" cap="flat" cmpd="sng" algn="ctr">
+                      <a:noFill/>
+                    </a:lnL>
+                    <a:lnR w="0" cap="flat" cmpd="sng" algn="ctr">
+                      <a:noFill/>
+                    </a:lnR>
+                    <a:lnT w="0" cap="flat" cmpd="sng" algn="ctr">
+                      <a:noFill/>
+                    </a:lnT>
+                    <a:lnB w="9525" cap="flat" cmpd="sng" algn="ctr">
+                      <a:solidFill>
+                        <a:srgbClr val="D9E0EC"/>
+                      </a:solidFill>
+                      <a:prstDash val="solid"/>
+                      <a:round/>
+                      <a:headEnd type="none" w="med" len="med"/>
+                      <a:tailEnd type="none" w="med" len="med"/>
+                    </a:lnB>
+                  </a:tcPr>
+                </a:tc>
+              </a:tr>
+              <a:tr h="127000">
+                <a:tc>
+                  <a:txBody>
+                    <a:bodyPr/>
+                    <a:lstStyle/>
+                    <a:p>
+                      <a:pPr indent="0" marL="0">
+                        <a:buNone/>
+                      </a:pPr>
+                      <a:r>
+                        <a:rPr lang="en-US" sz="800" dirty="0">
+                          <a:solidFill>
+                            <a:srgbClr val="46536B"/>
+                          </a:solidFill>
+                          <a:latin typeface="Malgun Gothic" pitchFamily="34" charset="0"/>
+                          <a:ea typeface="Malgun Gothic" pitchFamily="34" charset="-122"/>
+                          <a:cs typeface="Malgun Gothic" pitchFamily="34" charset="-120"/>
+                        </a:rPr>
+                        <a:t>오픈소스</a:t>
+                      </a:r>
+                      <a:endParaRPr lang="en-US" sz="1200" dirty="0"/>
+                    </a:p>
+                  </a:txBody>
+                  <a:tcPr marL="88900" marR="88900" marT="12700" marB="12700" anchor="t">
+                    <a:lnL w="0" cap="flat" cmpd="sng" algn="ctr">
+                      <a:noFill/>
+                    </a:lnL>
+                    <a:lnR w="0" cap="flat" cmpd="sng" algn="ctr">
+                      <a:noFill/>
+                    </a:lnR>
+                    <a:lnT w="0" cap="flat" cmpd="sng" algn="ctr">
+                      <a:noFill/>
+                    </a:lnT>
+                    <a:lnB w="9525" cap="flat" cmpd="sng" algn="ctr">
+                      <a:solidFill>
+                        <a:srgbClr val="D9E0EC"/>
+                      </a:solidFill>
+                      <a:prstDash val="solid"/>
+                      <a:round/>
+                      <a:headEnd type="none" w="med" len="med"/>
+                      <a:tailEnd type="none" w="med" len="med"/>
+                    </a:lnB>
+                  </a:tcPr>
+                </a:tc>
+                <a:tc>
+                  <a:txBody>
+                    <a:bodyPr/>
+                    <a:lstStyle/>
+                    <a:p>
+                      <a:pPr indent="0" marL="0">
+                        <a:buNone/>
+                      </a:pPr>
+                      <a:r>
+                        <a:rPr lang="en-US" sz="800" dirty="0">
+                          <a:solidFill>
+                            <a:srgbClr val="46536B"/>
+                          </a:solidFill>
+                          <a:latin typeface="Malgun Gothic" pitchFamily="34" charset="0"/>
+                          <a:ea typeface="Malgun Gothic" pitchFamily="34" charset="-122"/>
+                          <a:cs typeface="Malgun Gothic" pitchFamily="34" charset="-120"/>
+                        </a:rPr>
+                        <a:t>Z-Image-Turbo, EchoMimicV3, Wan2.1-Fun-V1.1-1.3B-InP, chinese-wav2vec2-base</a:t>
+                      </a:r>
+                      <a:endParaRPr lang="en-US" sz="1200" dirty="0"/>
+                    </a:p>
+                  </a:txBody>
+                  <a:tcPr marL="88900" marR="88900" marT="12700" marB="12700" anchor="t">
+                    <a:lnL w="0" cap="flat" cmpd="sng" algn="ctr">
+                      <a:noFill/>
+                    </a:lnL>
+                    <a:lnR w="0" cap="flat" cmpd="sng" algn="ctr">
+                      <a:noFill/>
+                    </a:lnR>
+                    <a:lnT w="0" cap="flat" cmpd="sng" algn="ctr">
+                      <a:noFill/>
+                    </a:lnT>
+                    <a:lnB w="9525" cap="flat" cmpd="sng" algn="ctr">
+                      <a:solidFill>
+                        <a:srgbClr val="D9E0EC"/>
+                      </a:solidFill>
+                      <a:prstDash val="solid"/>
+                      <a:round/>
+                      <a:headEnd type="none" w="med" len="med"/>
+                      <a:tailEnd type="none" w="med" len="med"/>
+                    </a:lnB>
+                  </a:tcPr>
+                </a:tc>
+                <a:tc>
+                  <a:txBody>
+                    <a:bodyPr/>
+                    <a:lstStyle/>
+                    <a:p>
+                      <a:pPr indent="0" marL="0">
+                        <a:buNone/>
+                      </a:pPr>
+                      <a:r>
+                        <a:rPr lang="en-US" sz="800" dirty="0">
+                          <a:solidFill>
+                            <a:srgbClr val="46536B"/>
+                          </a:solidFill>
+                          <a:latin typeface="Malgun Gothic" pitchFamily="34" charset="0"/>
+                          <a:ea typeface="Malgun Gothic" pitchFamily="34" charset="-122"/>
+                          <a:cs typeface="Malgun Gothic" pitchFamily="34" charset="-120"/>
+                        </a:rPr>
+                        <a:t>가상 얼굴, AI 생성 표시 영상</a:t>
+                      </a:r>
+                      <a:endParaRPr lang="en-US" sz="1200" dirty="0"/>
+                    </a:p>
+                  </a:txBody>
+                  <a:tcPr marL="88900" marR="88900" marT="12700" marB="12700" anchor="t">
+                    <a:lnL w="0" cap="flat" cmpd="sng" algn="ctr">
+                      <a:noFill/>
+                    </a:lnL>
+                    <a:lnR w="0" cap="flat" cmpd="sng" algn="ctr">
+                      <a:noFill/>
+                    </a:lnR>
+                    <a:lnT w="0" cap="flat" cmpd="sng" algn="ctr">
+                      <a:noFill/>
+                    </a:lnT>
+                    <a:lnB w="9525" cap="flat" cmpd="sng" algn="ctr">
+                      <a:solidFill>
+                        <a:srgbClr val="D9E0EC"/>
+                      </a:solidFill>
+                      <a:prstDash val="solid"/>
+                      <a:round/>
+                      <a:headEnd type="none" w="med" len="med"/>
+                      <a:tailEnd type="none" w="med" len="med"/>
+                    </a:lnB>
+                  </a:tcPr>
+                </a:tc>
+                <a:tc>
+                  <a:txBody>
+                    <a:bodyPr/>
+                    <a:lstStyle/>
+                    <a:p>
+                      <a:pPr indent="0" marL="0">
+                        <a:buNone/>
+                      </a:pPr>
+                      <a:r>
+                        <a:rPr lang="en-US" sz="800" dirty="0">
+                          <a:solidFill>
+                            <a:srgbClr val="46536B"/>
+                          </a:solidFill>
+                          <a:latin typeface="Malgun Gothic" pitchFamily="34" charset="0"/>
+                          <a:ea typeface="Malgun Gothic" pitchFamily="34" charset="-122"/>
+                          <a:cs typeface="Malgun Gothic" pitchFamily="34" charset="-120"/>
+                        </a:rPr>
+                        <a:t>Apache 2.0, MIT</a:t>
+                      </a:r>
+                      <a:endParaRPr lang="en-US" sz="1200" dirty="0"/>
+                    </a:p>
+                  </a:txBody>
+                  <a:tcPr marL="88900" marR="88900" marT="12700" marB="12700" anchor="t">
+                    <a:lnL w="0" cap="flat" cmpd="sng" algn="ctr">
+                      <a:noFill/>
+                    </a:lnL>
+                    <a:lnR w="0" cap="flat" cmpd="sng" algn="ctr">
+                      <a:noFill/>
+                    </a:lnR>
+                    <a:lnT w="0" cap="flat" cmpd="sng" algn="ctr">
+                      <a:noFill/>
+                    </a:lnT>
+                    <a:lnB w="9525" cap="flat" cmpd="sng" algn="ctr">
+                      <a:solidFill>
+                        <a:srgbClr val="D9E0EC"/>
+                      </a:solidFill>
+                      <a:prstDash val="solid"/>
+                      <a:round/>
+                      <a:headEnd type="none" w="med" len="med"/>
+                      <a:tailEnd type="none" w="med" len="med"/>
+                    </a:lnB>
+                  </a:tcPr>
+                </a:tc>
+              </a:tr>
+              <a:tr h="127000">
+                <a:tc>
+                  <a:txBody>
+                    <a:bodyPr/>
+                    <a:lstStyle/>
+                    <a:p>
+                      <a:pPr indent="0" marL="0">
+                        <a:buNone/>
+                      </a:pPr>
+                      <a:r>
+                        <a:rPr lang="en-US" sz="800" dirty="0">
+                          <a:solidFill>
+                            <a:srgbClr val="46536B"/>
+                          </a:solidFill>
+                          <a:latin typeface="Malgun Gothic" pitchFamily="34" charset="0"/>
+                          <a:ea typeface="Malgun Gothic" pitchFamily="34" charset="-122"/>
+                          <a:cs typeface="Malgun Gothic" pitchFamily="34" charset="-120"/>
+                        </a:rPr>
+                        <a:t>오픈소스</a:t>
+                      </a:r>
+                      <a:endParaRPr lang="en-US" sz="1200" dirty="0"/>
+                    </a:p>
+                  </a:txBody>
+                  <a:tcPr marL="88900" marR="88900" marT="12700" marB="12700" anchor="t">
+                    <a:lnL w="0" cap="flat" cmpd="sng" algn="ctr">
+                      <a:noFill/>
+                    </a:lnL>
+                    <a:lnR w="0" cap="flat" cmpd="sng" algn="ctr">
+                      <a:noFill/>
+                    </a:lnR>
+                    <a:lnT w="0" cap="flat" cmpd="sng" algn="ctr">
+                      <a:noFill/>
+                    </a:lnT>
+                    <a:lnB w="9525" cap="flat" cmpd="sng" algn="ctr">
+                      <a:solidFill>
+                        <a:srgbClr val="D9E0EC"/>
+                      </a:solidFill>
+                      <a:prstDash val="solid"/>
+                      <a:round/>
+                      <a:headEnd type="none" w="med" len="med"/>
+                      <a:tailEnd type="none" w="med" len="med"/>
+                    </a:lnB>
+                  </a:tcPr>
+                </a:tc>
+                <a:tc>
+                  <a:txBody>
+                    <a:bodyPr/>
+                    <a:lstStyle/>
+                    <a:p>
+                      <a:pPr indent="0" marL="0">
+                        <a:buNone/>
+                      </a:pPr>
+                      <a:r>
+                        <a:rPr lang="en-US" sz="800" dirty="0">
+                          <a:solidFill>
+                            <a:srgbClr val="46536B"/>
+                          </a:solidFill>
+                          <a:latin typeface="Malgun Gothic" pitchFamily="34" charset="0"/>
+                          <a:ea typeface="Malgun Gothic" pitchFamily="34" charset="-122"/>
+                          <a:cs typeface="Malgun Gothic" pitchFamily="34" charset="-120"/>
+                        </a:rPr>
+                        <a:t>FFmpeg</a:t>
+                      </a:r>
+                      <a:endParaRPr lang="en-US" sz="1200" dirty="0"/>
+                    </a:p>
+                  </a:txBody>
+                  <a:tcPr marL="88900" marR="88900" marT="12700" marB="12700" anchor="t">
+                    <a:lnL w="0" cap="flat" cmpd="sng" algn="ctr">
+                      <a:noFill/>
+                    </a:lnL>
+                    <a:lnR w="0" cap="flat" cmpd="sng" algn="ctr">
+                      <a:noFill/>
+                    </a:lnR>
+                    <a:lnT w="0" cap="flat" cmpd="sng" algn="ctr">
+                      <a:noFill/>
+                    </a:lnT>
+                    <a:lnB w="9525" cap="flat" cmpd="sng" algn="ctr">
+                      <a:solidFill>
+                        <a:srgbClr val="D9E0EC"/>
+                      </a:solidFill>
+                      <a:prstDash val="solid"/>
+                      <a:round/>
+                      <a:headEnd type="none" w="med" len="med"/>
+                      <a:tailEnd type="none" w="med" len="med"/>
+                    </a:lnB>
+                  </a:tcPr>
+                </a:tc>
+                <a:tc>
+                  <a:txBody>
+                    <a:bodyPr/>
+                    <a:lstStyle/>
+                    <a:p>
+                      <a:pPr indent="0" marL="0">
+                        <a:buNone/>
+                      </a:pPr>
+                      <a:r>
+                        <a:rPr lang="en-US" sz="800" dirty="0">
+                          <a:solidFill>
+                            <a:srgbClr val="46536B"/>
+                          </a:solidFill>
+                          <a:latin typeface="Malgun Gothic" pitchFamily="34" charset="0"/>
+                          <a:ea typeface="Malgun Gothic" pitchFamily="34" charset="-122"/>
+                          <a:cs typeface="Malgun Gothic" pitchFamily="34" charset="-120"/>
+                        </a:rPr>
+                        <a:t>음성 변환, 속도 조절, 영상 표시</a:t>
+                      </a:r>
+                      <a:endParaRPr lang="en-US" sz="1200" dirty="0"/>
+                    </a:p>
+                  </a:txBody>
+                  <a:tcPr marL="88900" marR="88900" marT="12700" marB="12700" anchor="t">
+                    <a:lnL w="0" cap="flat" cmpd="sng" algn="ctr">
+                      <a:noFill/>
+                    </a:lnL>
+                    <a:lnR w="0" cap="flat" cmpd="sng" algn="ctr">
+                      <a:noFill/>
+                    </a:lnR>
+                    <a:lnT w="0" cap="flat" cmpd="sng" algn="ctr">
+                      <a:noFill/>
+                    </a:lnT>
+                    <a:lnB w="9525" cap="flat" cmpd="sng" algn="ctr">
+                      <a:solidFill>
+                        <a:srgbClr val="D9E0EC"/>
+                      </a:solidFill>
+                      <a:prstDash val="solid"/>
+                      <a:round/>
+                      <a:headEnd type="none" w="med" len="med"/>
+                      <a:tailEnd type="none" w="med" len="med"/>
+                    </a:lnB>
+                  </a:tcPr>
+                </a:tc>
+                <a:tc>
+                  <a:txBody>
+                    <a:bodyPr/>
+                    <a:lstStyle/>
+                    <a:p>
+                      <a:pPr indent="0" marL="0">
+                        <a:buNone/>
+                      </a:pPr>
+                      <a:r>
+                        <a:rPr lang="en-US" sz="800" dirty="0">
+                          <a:solidFill>
+                            <a:srgbClr val="46536B"/>
+                          </a:solidFill>
+                          <a:latin typeface="Malgun Gothic" pitchFamily="34" charset="0"/>
+                          <a:ea typeface="Malgun Gothic" pitchFamily="34" charset="-122"/>
+                          <a:cs typeface="Malgun Gothic" pitchFamily="34" charset="-120"/>
+                        </a:rPr>
+                        <a:t>LGPL/GPL</a:t>
+                      </a:r>
+                      <a:endParaRPr lang="en-US" sz="1200" dirty="0"/>
+                    </a:p>
+                  </a:txBody>
+                  <a:tcPr marL="88900" marR="88900" marT="12700" marB="12700" anchor="t">
+                    <a:lnL w="0" cap="flat" cmpd="sng" algn="ctr">
+                      <a:noFill/>
+                    </a:lnL>
+                    <a:lnR w="0" cap="flat" cmpd="sng" algn="ctr">
+                      <a:noFill/>
+                    </a:lnR>
+                    <a:lnT w="0" cap="flat" cmpd="sng" algn="ctr">
+                      <a:noFill/>
+                    </a:lnT>
+                    <a:lnB w="9525" cap="flat" cmpd="sng" algn="ctr">
+                      <a:solidFill>
+                        <a:srgbClr val="D9E0EC"/>
+                      </a:solidFill>
+                      <a:prstDash val="solid"/>
+                      <a:round/>
+                      <a:headEnd type="none" w="med" len="med"/>
+                      <a:tailEnd type="none" w="med" len="med"/>
+                    </a:lnB>
+                  </a:tcPr>
+                </a:tc>
+              </a:tr>
+              <a:tr h="127000">
+                <a:tc>
+                  <a:txBody>
+                    <a:bodyPr/>
+                    <a:lstStyle/>
+                    <a:p>
+                      <a:pPr indent="0" marL="0">
+                        <a:buNone/>
+                      </a:pPr>
+                      <a:r>
+                        <a:rPr lang="en-US" sz="800" dirty="0">
+                          <a:solidFill>
+                            <a:srgbClr val="46536B"/>
+                          </a:solidFill>
+                          <a:latin typeface="Malgun Gothic" pitchFamily="34" charset="0"/>
+                          <a:ea typeface="Malgun Gothic" pitchFamily="34" charset="-122"/>
+                          <a:cs typeface="Malgun Gothic" pitchFamily="34" charset="-120"/>
+                        </a:rPr>
                         <a:t>외부 API</a:t>
                       </a:r>
                       <a:endParaRPr lang="en-US" sz="1200" dirty="0"/>
@@ -13609,7 +14653,7 @@
                         <a:buNone/>
                       </a:pPr>
                       <a:r>
-                        <a:rPr lang="en-US" sz="900" dirty="0">
+                        <a:rPr lang="en-US" sz="800" dirty="0">
                           <a:solidFill>
                             <a:srgbClr val="46536B"/>
                           </a:solidFill>
@@ -13652,7 +14696,7 @@
                         <a:buNone/>
                       </a:pPr>
                       <a:r>
-                        <a:rPr lang="en-US" sz="900" dirty="0">
+                        <a:rPr lang="en-US" sz="800" dirty="0">
                           <a:solidFill>
                             <a:srgbClr val="46536B"/>
                           </a:solidFill>
@@ -13695,7 +14739,7 @@
                         <a:buNone/>
                       </a:pPr>
                       <a:r>
-                        <a:rPr lang="en-US" sz="900" dirty="0">
+                        <a:rPr lang="en-US" sz="800" dirty="0">
                           <a:solidFill>
                             <a:srgbClr val="46536B"/>
                           </a:solidFill>
@@ -13730,17 +14774,17 @@
                   </a:tcPr>
                 </a:tc>
               </a:tr>
-              <a:tr h="139700">
-                <a:tc>
-                  <a:txBody>
-                    <a:bodyPr/>
-                    <a:lstStyle/>
-                    <a:p>
-                      <a:pPr indent="0" marL="0">
-                        <a:buNone/>
-                      </a:pPr>
-                      <a:r>
-                        <a:rPr lang="en-US" sz="900" dirty="0">
+              <a:tr h="127000">
+                <a:tc>
+                  <a:txBody>
+                    <a:bodyPr/>
+                    <a:lstStyle/>
+                    <a:p>
+                      <a:pPr indent="0" marL="0">
+                        <a:buNone/>
+                      </a:pPr>
+                      <a:r>
+                        <a:rPr lang="en-US" sz="800" dirty="0">
                           <a:solidFill>
                             <a:srgbClr val="46536B"/>
                           </a:solidFill>
@@ -13783,7 +14827,7 @@
                         <a:buNone/>
                       </a:pPr>
                       <a:r>
-                        <a:rPr lang="en-US" sz="900" dirty="0">
+                        <a:rPr lang="en-US" sz="800" dirty="0">
                           <a:solidFill>
                             <a:srgbClr val="46536B"/>
                           </a:solidFill>
@@ -13826,7 +14870,7 @@
                         <a:buNone/>
                       </a:pPr>
                       <a:r>
-                        <a:rPr lang="en-US" sz="900" dirty="0">
+                        <a:rPr lang="en-US" sz="800" dirty="0">
                           <a:solidFill>
                             <a:srgbClr val="46536B"/>
                           </a:solidFill>
@@ -13869,7 +14913,7 @@
                         <a:buNone/>
                       </a:pPr>
                       <a:r>
-                        <a:rPr lang="en-US" sz="900" dirty="0">
+                        <a:rPr lang="en-US" sz="800" dirty="0">
                           <a:solidFill>
                             <a:srgbClr val="46536B"/>
                           </a:solidFill>
@@ -13904,17 +14948,17 @@
                   </a:tcPr>
                 </a:tc>
               </a:tr>
-              <a:tr h="139700">
-                <a:tc>
-                  <a:txBody>
-                    <a:bodyPr/>
-                    <a:lstStyle/>
-                    <a:p>
-                      <a:pPr indent="0" marL="0">
-                        <a:buNone/>
-                      </a:pPr>
-                      <a:r>
-                        <a:rPr lang="en-US" sz="900" dirty="0">
+              <a:tr h="127000">
+                <a:tc>
+                  <a:txBody>
+                    <a:bodyPr/>
+                    <a:lstStyle/>
+                    <a:p>
+                      <a:pPr indent="0" marL="0">
+                        <a:buNone/>
+                      </a:pPr>
+                      <a:r>
+                        <a:rPr lang="en-US" sz="800" dirty="0">
                           <a:solidFill>
                             <a:srgbClr val="46536B"/>
                           </a:solidFill>
@@ -13957,7 +15001,7 @@
                         <a:buNone/>
                       </a:pPr>
                       <a:r>
-                        <a:rPr lang="en-US" sz="900" dirty="0">
+                        <a:rPr lang="en-US" sz="800" dirty="0">
                           <a:solidFill>
                             <a:srgbClr val="46536B"/>
                           </a:solidFill>
@@ -14000,7 +15044,7 @@
                         <a:buNone/>
                       </a:pPr>
                       <a:r>
-                        <a:rPr lang="en-US" sz="900" dirty="0">
+                        <a:rPr lang="en-US" sz="800" dirty="0">
                           <a:solidFill>
                             <a:srgbClr val="46536B"/>
                           </a:solidFill>
@@ -14043,7 +15087,7 @@
                         <a:buNone/>
                       </a:pPr>
                       <a:r>
-                        <a:rPr lang="en-US" sz="900" dirty="0">
+                        <a:rPr lang="en-US" sz="800" dirty="0">
                           <a:solidFill>
                             <a:srgbClr val="46536B"/>
                           </a:solidFill>
@@ -14078,17 +15122,17 @@
                   </a:tcPr>
                 </a:tc>
               </a:tr>
-              <a:tr h="139700">
-                <a:tc>
-                  <a:txBody>
-                    <a:bodyPr/>
-                    <a:lstStyle/>
-                    <a:p>
-                      <a:pPr indent="0" marL="0">
-                        <a:buNone/>
-                      </a:pPr>
-                      <a:r>
-                        <a:rPr lang="en-US" sz="900" dirty="0">
+              <a:tr h="127000">
+                <a:tc>
+                  <a:txBody>
+                    <a:bodyPr/>
+                    <a:lstStyle/>
+                    <a:p>
+                      <a:pPr indent="0" marL="0">
+                        <a:buNone/>
+                      </a:pPr>
+                      <a:r>
+                        <a:rPr lang="en-US" sz="800" dirty="0">
                           <a:solidFill>
                             <a:srgbClr val="46536B"/>
                           </a:solidFill>
@@ -14131,7 +15175,7 @@
                         <a:buNone/>
                       </a:pPr>
                       <a:r>
-                        <a:rPr lang="en-US" sz="900" dirty="0">
+                        <a:rPr lang="en-US" sz="800" dirty="0">
                           <a:solidFill>
                             <a:srgbClr val="46536B"/>
                           </a:solidFill>
@@ -14174,7 +15218,7 @@
                         <a:buNone/>
                       </a:pPr>
                       <a:r>
-                        <a:rPr lang="en-US" sz="900" dirty="0">
+                        <a:rPr lang="en-US" sz="800" dirty="0">
                           <a:solidFill>
                             <a:srgbClr val="46536B"/>
                           </a:solidFill>
@@ -14217,7 +15261,7 @@
                         <a:buNone/>
                       </a:pPr>
                       <a:r>
-                        <a:rPr lang="en-US" sz="900" dirty="0">
+                        <a:rPr lang="en-US" sz="800" dirty="0">
                           <a:solidFill>
                             <a:srgbClr val="46536B"/>
                           </a:solidFill>
@@ -14252,17 +15296,17 @@
                   </a:tcPr>
                 </a:tc>
               </a:tr>
-              <a:tr h="139700">
-                <a:tc>
-                  <a:txBody>
-                    <a:bodyPr/>
-                    <a:lstStyle/>
-                    <a:p>
-                      <a:pPr indent="0" marL="0">
-                        <a:buNone/>
-                      </a:pPr>
-                      <a:r>
-                        <a:rPr lang="en-US" sz="900" dirty="0">
+              <a:tr h="127000">
+                <a:tc>
+                  <a:txBody>
+                    <a:bodyPr/>
+                    <a:lstStyle/>
+                    <a:p>
+                      <a:pPr indent="0" marL="0">
+                        <a:buNone/>
+                      </a:pPr>
+                      <a:r>
+                        <a:rPr lang="en-US" sz="800" dirty="0">
                           <a:solidFill>
                             <a:srgbClr val="46536B"/>
                           </a:solidFill>
@@ -14305,7 +15349,7 @@
                         <a:buNone/>
                       </a:pPr>
                       <a:r>
-                        <a:rPr lang="en-US" sz="900" dirty="0">
+                        <a:rPr lang="en-US" sz="800" dirty="0">
                           <a:solidFill>
                             <a:srgbClr val="46536B"/>
                           </a:solidFill>
@@ -14348,7 +15392,7 @@
                         <a:buNone/>
                       </a:pPr>
                       <a:r>
-                        <a:rPr lang="en-US" sz="900" dirty="0">
+                        <a:rPr lang="en-US" sz="800" dirty="0">
                           <a:solidFill>
                             <a:srgbClr val="46536B"/>
                           </a:solidFill>
@@ -14391,7 +15435,7 @@
                         <a:buNone/>
                       </a:pPr>
                       <a:r>
-                        <a:rPr lang="en-US" sz="900" dirty="0">
+                        <a:rPr lang="en-US" sz="800" dirty="0">
                           <a:solidFill>
                             <a:srgbClr val="46536B"/>
                           </a:solidFill>
@@ -14426,17 +15470,17 @@
                   </a:tcPr>
                 </a:tc>
               </a:tr>
-              <a:tr h="139700">
-                <a:tc>
-                  <a:txBody>
-                    <a:bodyPr/>
-                    <a:lstStyle/>
-                    <a:p>
-                      <a:pPr indent="0" marL="0">
-                        <a:buNone/>
-                      </a:pPr>
-                      <a:r>
-                        <a:rPr lang="en-US" sz="900" dirty="0">
+              <a:tr h="127000">
+                <a:tc>
+                  <a:txBody>
+                    <a:bodyPr/>
+                    <a:lstStyle/>
+                    <a:p>
+                      <a:pPr indent="0" marL="0">
+                        <a:buNone/>
+                      </a:pPr>
+                      <a:r>
+                        <a:rPr lang="en-US" sz="800" dirty="0">
                           <a:solidFill>
                             <a:srgbClr val="46536B"/>
                           </a:solidFill>
@@ -14479,7 +15523,7 @@
                         <a:buNone/>
                       </a:pPr>
                       <a:r>
-                        <a:rPr lang="en-US" sz="900" dirty="0">
+                        <a:rPr lang="en-US" sz="800" dirty="0">
                           <a:solidFill>
                             <a:srgbClr val="46536B"/>
                           </a:solidFill>
@@ -14522,7 +15566,7 @@
                         <a:buNone/>
                       </a:pPr>
                       <a:r>
-                        <a:rPr lang="en-US" sz="900" dirty="0">
+                        <a:rPr lang="en-US" sz="800" dirty="0">
                           <a:solidFill>
                             <a:srgbClr val="46536B"/>
                           </a:solidFill>
@@ -14565,7 +15609,7 @@
                         <a:buNone/>
                       </a:pPr>
                       <a:r>
-                        <a:rPr lang="en-US" sz="900" dirty="0">
+                        <a:rPr lang="en-US" sz="800" dirty="0">
                           <a:solidFill>
                             <a:srgbClr val="46536B"/>
                           </a:solidFill>
@@ -14600,17 +15644,17 @@
                   </a:tcPr>
                 </a:tc>
               </a:tr>
-              <a:tr h="139700">
-                <a:tc>
-                  <a:txBody>
-                    <a:bodyPr/>
-                    <a:lstStyle/>
-                    <a:p>
-                      <a:pPr indent="0" marL="0">
-                        <a:buNone/>
-                      </a:pPr>
-                      <a:r>
-                        <a:rPr lang="en-US" sz="900" dirty="0">
+              <a:tr h="127000">
+                <a:tc>
+                  <a:txBody>
+                    <a:bodyPr/>
+                    <a:lstStyle/>
+                    <a:p>
+                      <a:pPr indent="0" marL="0">
+                        <a:buNone/>
+                      </a:pPr>
+                      <a:r>
+                        <a:rPr lang="en-US" sz="800" dirty="0">
                           <a:solidFill>
                             <a:srgbClr val="46536B"/>
                           </a:solidFill>
@@ -14653,7 +15697,7 @@
                         <a:buNone/>
                       </a:pPr>
                       <a:r>
-                        <a:rPr lang="en-US" sz="900" dirty="0">
+                        <a:rPr lang="en-US" sz="800" dirty="0">
                           <a:solidFill>
                             <a:srgbClr val="46536B"/>
                           </a:solidFill>
@@ -14696,7 +15740,7 @@
                         <a:buNone/>
                       </a:pPr>
                       <a:r>
-                        <a:rPr lang="en-US" sz="900" dirty="0">
+                        <a:rPr lang="en-US" sz="800" dirty="0">
                           <a:solidFill>
                             <a:srgbClr val="46536B"/>
                           </a:solidFill>
@@ -14739,7 +15783,7 @@
                         <a:buNone/>
                       </a:pPr>
                       <a:r>
-                        <a:rPr lang="en-US" sz="900" dirty="0">
+                        <a:rPr lang="en-US" sz="800" dirty="0">
                           <a:solidFill>
                             <a:srgbClr val="46536B"/>
                           </a:solidFill>
@@ -14774,17 +15818,17 @@
                   </a:tcPr>
                 </a:tc>
               </a:tr>
-              <a:tr h="139700">
-                <a:tc>
-                  <a:txBody>
-                    <a:bodyPr/>
-                    <a:lstStyle/>
-                    <a:p>
-                      <a:pPr indent="0" marL="0">
-                        <a:buNone/>
-                      </a:pPr>
-                      <a:r>
-                        <a:rPr lang="en-US" sz="900" dirty="0">
+              <a:tr h="127000">
+                <a:tc>
+                  <a:txBody>
+                    <a:bodyPr/>
+                    <a:lstStyle/>
+                    <a:p>
+                      <a:pPr indent="0" marL="0">
+                        <a:buNone/>
+                      </a:pPr>
+                      <a:r>
+                        <a:rPr lang="en-US" sz="800" dirty="0">
                           <a:solidFill>
                             <a:srgbClr val="46536B"/>
                           </a:solidFill>
@@ -14827,7 +15871,7 @@
                         <a:buNone/>
                       </a:pPr>
                       <a:r>
-                        <a:rPr lang="en-US" sz="900" dirty="0">
+                        <a:rPr lang="en-US" sz="800" dirty="0">
                           <a:solidFill>
                             <a:srgbClr val="46536B"/>
                           </a:solidFill>
@@ -14870,7 +15914,7 @@
                         <a:buNone/>
                       </a:pPr>
                       <a:r>
-                        <a:rPr lang="en-US" sz="900" dirty="0">
+                        <a:rPr lang="en-US" sz="800" dirty="0">
                           <a:solidFill>
                             <a:srgbClr val="46536B"/>
                           </a:solidFill>
@@ -14913,7 +15957,7 @@
                         <a:buNone/>
                       </a:pPr>
                       <a:r>
-                        <a:rPr lang="en-US" sz="900" dirty="0">
+                        <a:rPr lang="en-US" sz="800" dirty="0">
                           <a:solidFill>
                             <a:srgbClr val="46536B"/>
                           </a:solidFill>
@@ -14948,17 +15992,17 @@
                   </a:tcPr>
                 </a:tc>
               </a:tr>
-              <a:tr h="139700">
-                <a:tc>
-                  <a:txBody>
-                    <a:bodyPr/>
-                    <a:lstStyle/>
-                    <a:p>
-                      <a:pPr indent="0" marL="0">
-                        <a:buNone/>
-                      </a:pPr>
-                      <a:r>
-                        <a:rPr lang="en-US" sz="900" dirty="0">
+              <a:tr h="127000">
+                <a:tc>
+                  <a:txBody>
+                    <a:bodyPr/>
+                    <a:lstStyle/>
+                    <a:p>
+                      <a:pPr indent="0" marL="0">
+                        <a:buNone/>
+                      </a:pPr>
+                      <a:r>
+                        <a:rPr lang="en-US" sz="800" dirty="0">
                           <a:solidFill>
                             <a:srgbClr val="46536B"/>
                           </a:solidFill>
@@ -15001,7 +16045,7 @@
                         <a:buNone/>
                       </a:pPr>
                       <a:r>
-                        <a:rPr lang="en-US" sz="900" dirty="0">
+                        <a:rPr lang="en-US" sz="800" dirty="0">
                           <a:solidFill>
                             <a:srgbClr val="46536B"/>
                           </a:solidFill>
@@ -15044,7 +16088,7 @@
                         <a:buNone/>
                       </a:pPr>
                       <a:r>
-                        <a:rPr lang="en-US" sz="900" dirty="0">
+                        <a:rPr lang="en-US" sz="800" dirty="0">
                           <a:solidFill>
                             <a:srgbClr val="46536B"/>
                           </a:solidFill>
@@ -15087,7 +16131,7 @@
                         <a:buNone/>
                       </a:pPr>
                       <a:r>
-                        <a:rPr lang="en-US" sz="900" dirty="0">
+                        <a:rPr lang="en-US" sz="800" dirty="0">
                           <a:solidFill>
                             <a:srgbClr val="46536B"/>
                           </a:solidFill>
@@ -15122,17 +16166,17 @@
                   </a:tcPr>
                 </a:tc>
               </a:tr>
-              <a:tr h="139700">
-                <a:tc>
-                  <a:txBody>
-                    <a:bodyPr/>
-                    <a:lstStyle/>
-                    <a:p>
-                      <a:pPr indent="0" marL="0">
-                        <a:buNone/>
-                      </a:pPr>
-                      <a:r>
-                        <a:rPr lang="en-US" sz="900" dirty="0">
+              <a:tr h="127000">
+                <a:tc>
+                  <a:txBody>
+                    <a:bodyPr/>
+                    <a:lstStyle/>
+                    <a:p>
+                      <a:pPr indent="0" marL="0">
+                        <a:buNone/>
+                      </a:pPr>
+                      <a:r>
+                        <a:rPr lang="en-US" sz="800" dirty="0">
                           <a:solidFill>
                             <a:srgbClr val="46536B"/>
                           </a:solidFill>
@@ -15175,7 +16219,7 @@
                         <a:buNone/>
                       </a:pPr>
                       <a:r>
-                        <a:rPr lang="en-US" sz="900" dirty="0">
+                        <a:rPr lang="en-US" sz="800" dirty="0">
                           <a:solidFill>
                             <a:srgbClr val="46536B"/>
                           </a:solidFill>
@@ -15218,7 +16262,7 @@
                         <a:buNone/>
                       </a:pPr>
                       <a:r>
-                        <a:rPr lang="en-US" sz="900" dirty="0">
+                        <a:rPr lang="en-US" sz="800" dirty="0">
                           <a:solidFill>
                             <a:srgbClr val="46536B"/>
                           </a:solidFill>
@@ -15261,7 +16305,7 @@
                         <a:buNone/>
                       </a:pPr>
                       <a:r>
-                        <a:rPr lang="en-US" sz="900" dirty="0">
+                        <a:rPr lang="en-US" sz="800" dirty="0">
                           <a:solidFill>
                             <a:srgbClr val="46536B"/>
                           </a:solidFill>
@@ -15296,17 +16340,17 @@
                   </a:tcPr>
                 </a:tc>
               </a:tr>
-              <a:tr h="139700">
-                <a:tc>
-                  <a:txBody>
-                    <a:bodyPr/>
-                    <a:lstStyle/>
-                    <a:p>
-                      <a:pPr indent="0" marL="0">
-                        <a:buNone/>
-                      </a:pPr>
-                      <a:r>
-                        <a:rPr lang="en-US" sz="900" dirty="0">
+              <a:tr h="127000">
+                <a:tc>
+                  <a:txBody>
+                    <a:bodyPr/>
+                    <a:lstStyle/>
+                    <a:p>
+                      <a:pPr indent="0" marL="0">
+                        <a:buNone/>
+                      </a:pPr>
+                      <a:r>
+                        <a:rPr lang="en-US" sz="800" dirty="0">
                           <a:solidFill>
                             <a:srgbClr val="46536B"/>
                           </a:solidFill>
@@ -15349,7 +16393,7 @@
                         <a:buNone/>
                       </a:pPr>
                       <a:r>
-                        <a:rPr lang="en-US" sz="900" dirty="0">
+                        <a:rPr lang="en-US" sz="800" dirty="0">
                           <a:solidFill>
                             <a:srgbClr val="46536B"/>
                           </a:solidFill>
@@ -15392,7 +16436,7 @@
                         <a:buNone/>
                       </a:pPr>
                       <a:r>
-                        <a:rPr lang="en-US" sz="900" dirty="0">
+                        <a:rPr lang="en-US" sz="800" dirty="0">
                           <a:solidFill>
                             <a:srgbClr val="46536B"/>
                           </a:solidFill>
@@ -15435,7 +16479,7 @@
                         <a:buNone/>
                       </a:pPr>
                       <a:r>
-                        <a:rPr lang="en-US" sz="900" dirty="0">
+                        <a:rPr lang="en-US" sz="800" dirty="0">
                           <a:solidFill>
                             <a:srgbClr val="46536B"/>
                           </a:solidFill>
@@ -15444,6 +16488,528 @@
                           <a:cs typeface="Malgun Gothic" pitchFamily="34" charset="-120"/>
                         </a:rPr>
                         <a:t>출처 표시 인용</a:t>
+                      </a:r>
+                      <a:endParaRPr lang="en-US" sz="1200" dirty="0"/>
+                    </a:p>
+                  </a:txBody>
+                  <a:tcPr marL="88900" marR="88900" marT="12700" marB="12700" anchor="t">
+                    <a:lnL w="0" cap="flat" cmpd="sng" algn="ctr">
+                      <a:noFill/>
+                    </a:lnL>
+                    <a:lnR w="0" cap="flat" cmpd="sng" algn="ctr">
+                      <a:noFill/>
+                    </a:lnR>
+                    <a:lnT w="0" cap="flat" cmpd="sng" algn="ctr">
+                      <a:noFill/>
+                    </a:lnT>
+                    <a:lnB w="9525" cap="flat" cmpd="sng" algn="ctr">
+                      <a:solidFill>
+                        <a:srgbClr val="D9E0EC"/>
+                      </a:solidFill>
+                      <a:prstDash val="solid"/>
+                      <a:round/>
+                      <a:headEnd type="none" w="med" len="med"/>
+                      <a:tailEnd type="none" w="med" len="med"/>
+                    </a:lnB>
+                  </a:tcPr>
+                </a:tc>
+              </a:tr>
+              <a:tr h="127000">
+                <a:tc>
+                  <a:txBody>
+                    <a:bodyPr/>
+                    <a:lstStyle/>
+                    <a:p>
+                      <a:pPr indent="0" marL="0">
+                        <a:buNone/>
+                      </a:pPr>
+                      <a:r>
+                        <a:rPr lang="en-US" sz="800" dirty="0">
+                          <a:solidFill>
+                            <a:srgbClr val="46536B"/>
+                          </a:solidFill>
+                          <a:latin typeface="Malgun Gothic" pitchFamily="34" charset="0"/>
+                          <a:ea typeface="Malgun Gothic" pitchFamily="34" charset="-122"/>
+                          <a:cs typeface="Malgun Gothic" pitchFamily="34" charset="-120"/>
+                        </a:rPr>
+                        <a:t>기타</a:t>
+                      </a:r>
+                      <a:endParaRPr lang="en-US" sz="1200" dirty="0"/>
+                    </a:p>
+                  </a:txBody>
+                  <a:tcPr marL="88900" marR="88900" marT="12700" marB="12700" anchor="t">
+                    <a:lnL w="0" cap="flat" cmpd="sng" algn="ctr">
+                      <a:noFill/>
+                    </a:lnL>
+                    <a:lnR w="0" cap="flat" cmpd="sng" algn="ctr">
+                      <a:noFill/>
+                    </a:lnR>
+                    <a:lnT w="0" cap="flat" cmpd="sng" algn="ctr">
+                      <a:noFill/>
+                    </a:lnT>
+                    <a:lnB w="9525" cap="flat" cmpd="sng" algn="ctr">
+                      <a:solidFill>
+                        <a:srgbClr val="D9E0EC"/>
+                      </a:solidFill>
+                      <a:prstDash val="solid"/>
+                      <a:round/>
+                      <a:headEnd type="none" w="med" len="med"/>
+                      <a:tailEnd type="none" w="med" len="med"/>
+                    </a:lnB>
+                  </a:tcPr>
+                </a:tc>
+                <a:tc>
+                  <a:txBody>
+                    <a:bodyPr/>
+                    <a:lstStyle/>
+                    <a:p>
+                      <a:pPr indent="0" marL="0">
+                        <a:buNone/>
+                      </a:pPr>
+                      <a:r>
+                        <a:rPr lang="en-US" sz="800" dirty="0">
+                          <a:solidFill>
+                            <a:srgbClr val="46536B"/>
+                          </a:solidFill>
+                          <a:latin typeface="Malgun Gothic" pitchFamily="34" charset="0"/>
+                          <a:ea typeface="Malgun Gothic" pitchFamily="34" charset="-122"/>
+                          <a:cs typeface="Malgun Gothic" pitchFamily="34" charset="-120"/>
+                        </a:rPr>
+                        <a:t>Modal 서버리스 GPU, NVIDIA L40S 48GB</a:t>
+                      </a:r>
+                      <a:endParaRPr lang="en-US" sz="1200" dirty="0"/>
+                    </a:p>
+                  </a:txBody>
+                  <a:tcPr marL="88900" marR="88900" marT="12700" marB="12700" anchor="t">
+                    <a:lnL w="0" cap="flat" cmpd="sng" algn="ctr">
+                      <a:noFill/>
+                    </a:lnL>
+                    <a:lnR w="0" cap="flat" cmpd="sng" algn="ctr">
+                      <a:noFill/>
+                    </a:lnR>
+                    <a:lnT w="0" cap="flat" cmpd="sng" algn="ctr">
+                      <a:noFill/>
+                    </a:lnT>
+                    <a:lnB w="9525" cap="flat" cmpd="sng" algn="ctr">
+                      <a:solidFill>
+                        <a:srgbClr val="D9E0EC"/>
+                      </a:solidFill>
+                      <a:prstDash val="solid"/>
+                      <a:round/>
+                      <a:headEnd type="none" w="med" len="med"/>
+                      <a:tailEnd type="none" w="med" len="med"/>
+                    </a:lnB>
+                  </a:tcPr>
+                </a:tc>
+                <a:tc>
+                  <a:txBody>
+                    <a:bodyPr/>
+                    <a:lstStyle/>
+                    <a:p>
+                      <a:pPr indent="0" marL="0">
+                        <a:buNone/>
+                      </a:pPr>
+                      <a:r>
+                        <a:rPr lang="en-US" sz="800" dirty="0">
+                          <a:solidFill>
+                            <a:srgbClr val="46536B"/>
+                          </a:solidFill>
+                          <a:latin typeface="Malgun Gothic" pitchFamily="34" charset="0"/>
+                          <a:ea typeface="Malgun Gothic" pitchFamily="34" charset="-122"/>
+                          <a:cs typeface="Malgun Gothic" pitchFamily="34" charset="-120"/>
+                        </a:rPr>
+                        <a:t>판정·음성·영상 콘텐츠 사전 생성</a:t>
+                      </a:r>
+                      <a:endParaRPr lang="en-US" sz="1200" dirty="0"/>
+                    </a:p>
+                  </a:txBody>
+                  <a:tcPr marL="88900" marR="88900" marT="12700" marB="12700" anchor="t">
+                    <a:lnL w="0" cap="flat" cmpd="sng" algn="ctr">
+                      <a:noFill/>
+                    </a:lnL>
+                    <a:lnR w="0" cap="flat" cmpd="sng" algn="ctr">
+                      <a:noFill/>
+                    </a:lnR>
+                    <a:lnT w="0" cap="flat" cmpd="sng" algn="ctr">
+                      <a:noFill/>
+                    </a:lnT>
+                    <a:lnB w="9525" cap="flat" cmpd="sng" algn="ctr">
+                      <a:solidFill>
+                        <a:srgbClr val="D9E0EC"/>
+                      </a:solidFill>
+                      <a:prstDash val="solid"/>
+                      <a:round/>
+                      <a:headEnd type="none" w="med" len="med"/>
+                      <a:tailEnd type="none" w="med" len="med"/>
+                    </a:lnB>
+                  </a:tcPr>
+                </a:tc>
+                <a:tc>
+                  <a:txBody>
+                    <a:bodyPr/>
+                    <a:lstStyle/>
+                    <a:p>
+                      <a:pPr indent="0" marL="0">
+                        <a:buNone/>
+                      </a:pPr>
+                      <a:r>
+                        <a:rPr lang="en-US" sz="800" dirty="0">
+                          <a:solidFill>
+                            <a:srgbClr val="46536B"/>
+                          </a:solidFill>
+                          <a:latin typeface="Malgun Gothic" pitchFamily="34" charset="0"/>
+                          <a:ea typeface="Malgun Gothic" pitchFamily="34" charset="-122"/>
+                          <a:cs typeface="Malgun Gothic" pitchFamily="34" charset="-120"/>
+                        </a:rPr>
+                        <a:t>상용 서비스</a:t>
+                      </a:r>
+                      <a:endParaRPr lang="en-US" sz="1200" dirty="0"/>
+                    </a:p>
+                  </a:txBody>
+                  <a:tcPr marL="88900" marR="88900" marT="12700" marB="12700" anchor="t">
+                    <a:lnL w="0" cap="flat" cmpd="sng" algn="ctr">
+                      <a:noFill/>
+                    </a:lnL>
+                    <a:lnR w="0" cap="flat" cmpd="sng" algn="ctr">
+                      <a:noFill/>
+                    </a:lnR>
+                    <a:lnT w="0" cap="flat" cmpd="sng" algn="ctr">
+                      <a:noFill/>
+                    </a:lnT>
+                    <a:lnB w="9525" cap="flat" cmpd="sng" algn="ctr">
+                      <a:solidFill>
+                        <a:srgbClr val="D9E0EC"/>
+                      </a:solidFill>
+                      <a:prstDash val="solid"/>
+                      <a:round/>
+                      <a:headEnd type="none" w="med" len="med"/>
+                      <a:tailEnd type="none" w="med" len="med"/>
+                    </a:lnB>
+                  </a:tcPr>
+                </a:tc>
+              </a:tr>
+              <a:tr h="127000">
+                <a:tc>
+                  <a:txBody>
+                    <a:bodyPr/>
+                    <a:lstStyle/>
+                    <a:p>
+                      <a:pPr indent="0" marL="0">
+                        <a:buNone/>
+                      </a:pPr>
+                      <a:r>
+                        <a:rPr lang="en-US" sz="800" dirty="0">
+                          <a:solidFill>
+                            <a:srgbClr val="46536B"/>
+                          </a:solidFill>
+                          <a:latin typeface="Malgun Gothic" pitchFamily="34" charset="0"/>
+                          <a:ea typeface="Malgun Gothic" pitchFamily="34" charset="-122"/>
+                          <a:cs typeface="Malgun Gothic" pitchFamily="34" charset="-120"/>
+                        </a:rPr>
+                        <a:t>기타</a:t>
+                      </a:r>
+                      <a:endParaRPr lang="en-US" sz="1200" dirty="0"/>
+                    </a:p>
+                  </a:txBody>
+                  <a:tcPr marL="88900" marR="88900" marT="12700" marB="12700" anchor="t">
+                    <a:lnL w="0" cap="flat" cmpd="sng" algn="ctr">
+                      <a:noFill/>
+                    </a:lnL>
+                    <a:lnR w="0" cap="flat" cmpd="sng" algn="ctr">
+                      <a:noFill/>
+                    </a:lnR>
+                    <a:lnT w="0" cap="flat" cmpd="sng" algn="ctr">
+                      <a:noFill/>
+                    </a:lnT>
+                    <a:lnB w="9525" cap="flat" cmpd="sng" algn="ctr">
+                      <a:solidFill>
+                        <a:srgbClr val="D9E0EC"/>
+                      </a:solidFill>
+                      <a:prstDash val="solid"/>
+                      <a:round/>
+                      <a:headEnd type="none" w="med" len="med"/>
+                      <a:tailEnd type="none" w="med" len="med"/>
+                    </a:lnB>
+                  </a:tcPr>
+                </a:tc>
+                <a:tc>
+                  <a:txBody>
+                    <a:bodyPr/>
+                    <a:lstStyle/>
+                    <a:p>
+                      <a:pPr indent="0" marL="0">
+                        <a:buNone/>
+                      </a:pPr>
+                      <a:r>
+                        <a:rPr lang="en-US" sz="800" dirty="0">
+                          <a:solidFill>
+                            <a:srgbClr val="46536B"/>
+                          </a:solidFill>
+                          <a:latin typeface="Malgun Gothic" pitchFamily="34" charset="0"/>
+                          <a:ea typeface="Malgun Gothic" pitchFamily="34" charset="-122"/>
+                          <a:cs typeface="Malgun Gothic" pitchFamily="34" charset="-120"/>
+                        </a:rPr>
+                        <a:t>Web Speech API, Web Audio API, macOS say</a:t>
+                      </a:r>
+                      <a:endParaRPr lang="en-US" sz="1200" dirty="0"/>
+                    </a:p>
+                  </a:txBody>
+                  <a:tcPr marL="88900" marR="88900" marT="12700" marB="12700" anchor="t">
+                    <a:lnL w="0" cap="flat" cmpd="sng" algn="ctr">
+                      <a:noFill/>
+                    </a:lnL>
+                    <a:lnR w="0" cap="flat" cmpd="sng" algn="ctr">
+                      <a:noFill/>
+                    </a:lnR>
+                    <a:lnT w="0" cap="flat" cmpd="sng" algn="ctr">
+                      <a:noFill/>
+                    </a:lnT>
+                    <a:lnB w="9525" cap="flat" cmpd="sng" algn="ctr">
+                      <a:solidFill>
+                        <a:srgbClr val="D9E0EC"/>
+                      </a:solidFill>
+                      <a:prstDash val="solid"/>
+                      <a:round/>
+                      <a:headEnd type="none" w="med" len="med"/>
+                      <a:tailEnd type="none" w="med" len="med"/>
+                    </a:lnB>
+                  </a:tcPr>
+                </a:tc>
+                <a:tc>
+                  <a:txBody>
+                    <a:bodyPr/>
+                    <a:lstStyle/>
+                    <a:p>
+                      <a:pPr indent="0" marL="0">
+                        <a:buNone/>
+                      </a:pPr>
+                      <a:r>
+                        <a:rPr lang="en-US" sz="800" dirty="0">
+                          <a:solidFill>
+                            <a:srgbClr val="46536B"/>
+                          </a:solidFill>
+                          <a:latin typeface="Malgun Gothic" pitchFamily="34" charset="0"/>
+                          <a:ea typeface="Malgun Gothic" pitchFamily="34" charset="-122"/>
+                          <a:cs typeface="Malgun Gothic" pitchFamily="34" charset="-120"/>
+                        </a:rPr>
+                        <a:t>전화 훈련 대체 음성, 음질 필터, 합성 음성</a:t>
+                      </a:r>
+                      <a:endParaRPr lang="en-US" sz="1200" dirty="0"/>
+                    </a:p>
+                  </a:txBody>
+                  <a:tcPr marL="88900" marR="88900" marT="12700" marB="12700" anchor="t">
+                    <a:lnL w="0" cap="flat" cmpd="sng" algn="ctr">
+                      <a:noFill/>
+                    </a:lnL>
+                    <a:lnR w="0" cap="flat" cmpd="sng" algn="ctr">
+                      <a:noFill/>
+                    </a:lnR>
+                    <a:lnT w="0" cap="flat" cmpd="sng" algn="ctr">
+                      <a:noFill/>
+                    </a:lnT>
+                    <a:lnB w="9525" cap="flat" cmpd="sng" algn="ctr">
+                      <a:solidFill>
+                        <a:srgbClr val="D9E0EC"/>
+                      </a:solidFill>
+                      <a:prstDash val="solid"/>
+                      <a:round/>
+                      <a:headEnd type="none" w="med" len="med"/>
+                      <a:tailEnd type="none" w="med" len="med"/>
+                    </a:lnB>
+                  </a:tcPr>
+                </a:tc>
+                <a:tc>
+                  <a:txBody>
+                    <a:bodyPr/>
+                    <a:lstStyle/>
+                    <a:p>
+                      <a:pPr indent="0" marL="0">
+                        <a:buNone/>
+                      </a:pPr>
+                      <a:r>
+                        <a:rPr lang="en-US" sz="800" dirty="0">
+                          <a:solidFill>
+                            <a:srgbClr val="46536B"/>
+                          </a:solidFill>
+                          <a:latin typeface="Malgun Gothic" pitchFamily="34" charset="0"/>
+                          <a:ea typeface="Malgun Gothic" pitchFamily="34" charset="-122"/>
+                          <a:cs typeface="Malgun Gothic" pitchFamily="34" charset="-120"/>
+                        </a:rPr>
+                        <a:t>브라우저 기능, Google 약관, macOS 사용권</a:t>
+                      </a:r>
+                      <a:endParaRPr lang="en-US" sz="1200" dirty="0"/>
+                    </a:p>
+                  </a:txBody>
+                  <a:tcPr marL="88900" marR="88900" marT="12700" marB="12700" anchor="t">
+                    <a:lnL w="0" cap="flat" cmpd="sng" algn="ctr">
+                      <a:noFill/>
+                    </a:lnL>
+                    <a:lnR w="0" cap="flat" cmpd="sng" algn="ctr">
+                      <a:noFill/>
+                    </a:lnR>
+                    <a:lnT w="0" cap="flat" cmpd="sng" algn="ctr">
+                      <a:noFill/>
+                    </a:lnT>
+                    <a:lnB w="9525" cap="flat" cmpd="sng" algn="ctr">
+                      <a:solidFill>
+                        <a:srgbClr val="D9E0EC"/>
+                      </a:solidFill>
+                      <a:prstDash val="solid"/>
+                      <a:round/>
+                      <a:headEnd type="none" w="med" len="med"/>
+                      <a:tailEnd type="none" w="med" len="med"/>
+                    </a:lnB>
+                  </a:tcPr>
+                </a:tc>
+              </a:tr>
+              <a:tr h="127000">
+                <a:tc>
+                  <a:txBody>
+                    <a:bodyPr/>
+                    <a:lstStyle/>
+                    <a:p>
+                      <a:pPr indent="0" marL="0">
+                        <a:buNone/>
+                      </a:pPr>
+                      <a:r>
+                        <a:rPr lang="en-US" sz="800" dirty="0">
+                          <a:solidFill>
+                            <a:srgbClr val="46536B"/>
+                          </a:solidFill>
+                          <a:latin typeface="Malgun Gothic" pitchFamily="34" charset="0"/>
+                          <a:ea typeface="Malgun Gothic" pitchFamily="34" charset="-122"/>
+                          <a:cs typeface="Malgun Gothic" pitchFamily="34" charset="-120"/>
+                        </a:rPr>
+                        <a:t>기타</a:t>
+                      </a:r>
+                      <a:endParaRPr lang="en-US" sz="1200" dirty="0"/>
+                    </a:p>
+                  </a:txBody>
+                  <a:tcPr marL="88900" marR="88900" marT="12700" marB="12700" anchor="t">
+                    <a:lnL w="0" cap="flat" cmpd="sng" algn="ctr">
+                      <a:noFill/>
+                    </a:lnL>
+                    <a:lnR w="0" cap="flat" cmpd="sng" algn="ctr">
+                      <a:noFill/>
+                    </a:lnR>
+                    <a:lnT w="0" cap="flat" cmpd="sng" algn="ctr">
+                      <a:noFill/>
+                    </a:lnT>
+                    <a:lnB w="9525" cap="flat" cmpd="sng" algn="ctr">
+                      <a:solidFill>
+                        <a:srgbClr val="D9E0EC"/>
+                      </a:solidFill>
+                      <a:prstDash val="solid"/>
+                      <a:round/>
+                      <a:headEnd type="none" w="med" len="med"/>
+                      <a:tailEnd type="none" w="med" len="med"/>
+                    </a:lnB>
+                  </a:tcPr>
+                </a:tc>
+                <a:tc>
+                  <a:txBody>
+                    <a:bodyPr/>
+                    <a:lstStyle/>
+                    <a:p>
+                      <a:pPr indent="0" marL="0">
+                        <a:buNone/>
+                      </a:pPr>
+                      <a:r>
+                        <a:rPr lang="en-US" sz="800" dirty="0">
+                          <a:solidFill>
+                            <a:srgbClr val="46536B"/>
+                          </a:solidFill>
+                          <a:latin typeface="Malgun Gothic" pitchFamily="34" charset="0"/>
+                          <a:ea typeface="Malgun Gothic" pitchFamily="34" charset="-122"/>
+                          <a:cs typeface="Malgun Gothic" pitchFamily="34" charset="-120"/>
+                        </a:rPr>
+                        <a:t>금융위원회 「보이스피싱 피해예방 10계명」</a:t>
+                      </a:r>
+                      <a:endParaRPr lang="en-US" sz="1200" dirty="0"/>
+                    </a:p>
+                  </a:txBody>
+                  <a:tcPr marL="88900" marR="88900" marT="12700" marB="12700" anchor="t">
+                    <a:lnL w="0" cap="flat" cmpd="sng" algn="ctr">
+                      <a:noFill/>
+                    </a:lnL>
+                    <a:lnR w="0" cap="flat" cmpd="sng" algn="ctr">
+                      <a:noFill/>
+                    </a:lnR>
+                    <a:lnT w="0" cap="flat" cmpd="sng" algn="ctr">
+                      <a:noFill/>
+                    </a:lnT>
+                    <a:lnB w="9525" cap="flat" cmpd="sng" algn="ctr">
+                      <a:solidFill>
+                        <a:srgbClr val="D9E0EC"/>
+                      </a:solidFill>
+                      <a:prstDash val="solid"/>
+                      <a:round/>
+                      <a:headEnd type="none" w="med" len="med"/>
+                      <a:tailEnd type="none" w="med" len="med"/>
+                    </a:lnB>
+                  </a:tcPr>
+                </a:tc>
+                <a:tc>
+                  <a:txBody>
+                    <a:bodyPr/>
+                    <a:lstStyle/>
+                    <a:p>
+                      <a:pPr indent="0" marL="0">
+                        <a:buNone/>
+                      </a:pPr>
+                      <a:r>
+                        <a:rPr lang="en-US" sz="800" dirty="0">
+                          <a:solidFill>
+                            <a:srgbClr val="46536B"/>
+                          </a:solidFill>
+                          <a:latin typeface="Malgun Gothic" pitchFamily="34" charset="0"/>
+                          <a:ea typeface="Malgun Gothic" pitchFamily="34" charset="-122"/>
+                          <a:cs typeface="Malgun Gothic" pitchFamily="34" charset="-120"/>
+                        </a:rPr>
+                        <a:t>훈련 대본 참고 (새로 작성, 출처 표시)</a:t>
+                      </a:r>
+                      <a:endParaRPr lang="en-US" sz="1200" dirty="0"/>
+                    </a:p>
+                  </a:txBody>
+                  <a:tcPr marL="88900" marR="88900" marT="12700" marB="12700" anchor="t">
+                    <a:lnL w="0" cap="flat" cmpd="sng" algn="ctr">
+                      <a:noFill/>
+                    </a:lnL>
+                    <a:lnR w="0" cap="flat" cmpd="sng" algn="ctr">
+                      <a:noFill/>
+                    </a:lnR>
+                    <a:lnT w="0" cap="flat" cmpd="sng" algn="ctr">
+                      <a:noFill/>
+                    </a:lnT>
+                    <a:lnB w="9525" cap="flat" cmpd="sng" algn="ctr">
+                      <a:solidFill>
+                        <a:srgbClr val="D9E0EC"/>
+                      </a:solidFill>
+                      <a:prstDash val="solid"/>
+                      <a:round/>
+                      <a:headEnd type="none" w="med" len="med"/>
+                      <a:tailEnd type="none" w="med" len="med"/>
+                    </a:lnB>
+                  </a:tcPr>
+                </a:tc>
+                <a:tc>
+                  <a:txBody>
+                    <a:bodyPr/>
+                    <a:lstStyle/>
+                    <a:p>
+                      <a:pPr indent="0" marL="0">
+                        <a:buNone/>
+                      </a:pPr>
+                      <a:r>
+                        <a:rPr lang="en-US" sz="800" dirty="0">
+                          <a:solidFill>
+                            <a:srgbClr val="46536B"/>
+                          </a:solidFill>
+                          <a:latin typeface="Malgun Gothic" pitchFamily="34" charset="0"/>
+                          <a:ea typeface="Malgun Gothic" pitchFamily="34" charset="-122"/>
+                          <a:cs typeface="Malgun Gothic" pitchFamily="34" charset="-120"/>
+                        </a:rPr>
+                        <a:t>출처 표시, 공공누리 유형 확인 중</a:t>
                       </a:r>
                       <a:endParaRPr lang="en-US" sz="1200" dirty="0"/>
                     </a:p>
